--- a/2026_М_ПІ_ІПЗм-24-3_Кащенко_Ю_Є.pptx
+++ b/2026_М_ПІ_ІПЗм-24-3_Кащенко_Ю_Є.pptx
@@ -5,7 +5,7 @@
     <p:sldMasterId id="2147483648" r:id="rId1"/>
   </p:sldMasterIdLst>
   <p:notesMasterIdLst>
-    <p:notesMasterId r:id="rId12"/>
+    <p:notesMasterId r:id="rId14"/>
   </p:notesMasterIdLst>
   <p:sldIdLst>
     <p:sldId id="256" r:id="rId2"/>
@@ -17,7 +17,9 @@
     <p:sldId id="262" r:id="rId8"/>
     <p:sldId id="263" r:id="rId9"/>
     <p:sldId id="264" r:id="rId10"/>
-    <p:sldId id="265" r:id="rId11"/>
+    <p:sldId id="268" r:id="rId11"/>
+    <p:sldId id="269" r:id="rId12"/>
+    <p:sldId id="265" r:id="rId13"/>
   </p:sldIdLst>
   <p:sldSz cx="12192000" cy="6858000"/>
   <p:notesSz cx="6858000" cy="12192000"/>
@@ -346,6 +348,983 @@
 </c:chartSpace>
 </file>
 
+<file path=ppt/charts/chart2.xml><?xml version="1.0" encoding="utf-8"?>
+<c:chartSpace xmlns:c="http://schemas.openxmlformats.org/drawingml/2006/chart" xmlns:a="http://schemas.openxmlformats.org/drawingml/2006/main" xmlns:r="http://schemas.openxmlformats.org/officeDocument/2006/relationships" xmlns:c16r2="http://schemas.microsoft.com/office/drawing/2015/06/chart">
+  <c:date1904 val="0"/>
+  <c:lang val="uk-UA"/>
+  <c:roundedCorners val="0"/>
+  <mc:AlternateContent xmlns:mc="http://schemas.openxmlformats.org/markup-compatibility/2006">
+    <mc:Choice xmlns:c14="http://schemas.microsoft.com/office/drawing/2007/8/2/chart" Requires="c14">
+      <c14:style val="102"/>
+    </mc:Choice>
+    <mc:Fallback>
+      <c:style val="2"/>
+    </mc:Fallback>
+  </mc:AlternateContent>
+  <c:chart>
+    <c:title>
+      <c:tx>
+        <c:rich>
+          <a:bodyPr rot="0" spcFirstLastPara="1" vertOverflow="ellipsis" vert="horz" wrap="square" anchor="ctr" anchorCtr="1"/>
+          <a:lstStyle/>
+          <a:p>
+            <a:pPr>
+              <a:defRPr sz="1400" b="0" i="0" u="none" strike="noStrike" kern="1200" spc="0" baseline="0">
+                <a:solidFill>
+                  <a:schemeClr val="tx1">
+                    <a:lumMod val="65000"/>
+                    <a:lumOff val="35000"/>
+                  </a:schemeClr>
+                </a:solidFill>
+                <a:latin typeface="+mn-lt"/>
+                <a:ea typeface="+mn-ea"/>
+                <a:cs typeface="+mn-cs"/>
+              </a:defRPr>
+            </a:pPr>
+            <a:r>
+              <a:rPr lang="uk-UA"/>
+              <a:t>Середня</a:t>
+            </a:r>
+            <a:r>
+              <a:rPr lang="uk-UA" baseline="0"/>
+              <a:t> затримка доставки повідомлення</a:t>
+            </a:r>
+            <a:endParaRPr lang="uk-UA"/>
+          </a:p>
+        </c:rich>
+      </c:tx>
+      <c:overlay val="0"/>
+      <c:spPr>
+        <a:noFill/>
+        <a:ln>
+          <a:noFill/>
+        </a:ln>
+        <a:effectLst/>
+      </c:spPr>
+    </c:title>
+    <c:autoTitleDeleted val="0"/>
+    <c:plotArea>
+      <c:layout/>
+      <c:barChart>
+        <c:barDir val="col"/>
+        <c:grouping val="clustered"/>
+        <c:varyColors val="0"/>
+        <c:ser>
+          <c:idx val="0"/>
+          <c:order val="0"/>
+          <c:tx>
+            <c:v>Сценарій 1</c:v>
+          </c:tx>
+          <c:spPr>
+            <a:solidFill>
+              <a:schemeClr val="accent1"/>
+            </a:solidFill>
+            <a:ln w="6350">
+              <a:solidFill>
+                <a:schemeClr val="tx1"/>
+              </a:solidFill>
+            </a:ln>
+            <a:effectLst/>
+          </c:spPr>
+          <c:invertIfNegative val="0"/>
+          <c:cat>
+            <c:strRef>
+              <c:f>Аркуш1!$A$3:$A$8</c:f>
+              <c:strCache>
+                <c:ptCount val="6"/>
+                <c:pt idx="0">
+                  <c:v> Short Polling </c:v>
+                </c:pt>
+                <c:pt idx="1">
+                  <c:v> HTTP Long Polling </c:v>
+                </c:pt>
+                <c:pt idx="2">
+                  <c:v> Server-Sent Events </c:v>
+                </c:pt>
+                <c:pt idx="3">
+                  <c:v> WebSocket </c:v>
+                </c:pt>
+                <c:pt idx="4">
+                  <c:v> Socket.IO </c:v>
+                </c:pt>
+                <c:pt idx="5">
+                  <c:v> GraphQL Subscriptions </c:v>
+                </c:pt>
+              </c:strCache>
+            </c:strRef>
+          </c:cat>
+          <c:val>
+            <c:numRef>
+              <c:f>Аркуш1!$B$3:$B$8</c:f>
+              <c:numCache>
+                <c:formatCode>General</c:formatCode>
+                <c:ptCount val="6"/>
+                <c:pt idx="0">
+                  <c:v>47.59</c:v>
+                </c:pt>
+                <c:pt idx="1">
+                  <c:v>2.25</c:v>
+                </c:pt>
+                <c:pt idx="2">
+                  <c:v>0.68</c:v>
+                </c:pt>
+                <c:pt idx="3">
+                  <c:v>0.53</c:v>
+                </c:pt>
+                <c:pt idx="4">
+                  <c:v>0.63</c:v>
+                </c:pt>
+                <c:pt idx="5">
+                  <c:v>0.46</c:v>
+                </c:pt>
+              </c:numCache>
+            </c:numRef>
+          </c:val>
+          <c:extLst>
+            <c:ext xmlns:c16="http://schemas.microsoft.com/office/drawing/2014/chart" uri="{C3380CC4-5D6E-409C-BE32-E72D297353CC}">
+              <c16:uniqueId val="{00000000-5278-4FC3-943F-02C70D0B1151}"/>
+            </c:ext>
+          </c:extLst>
+        </c:ser>
+        <c:ser>
+          <c:idx val="1"/>
+          <c:order val="1"/>
+          <c:tx>
+            <c:v>Сценраій 2</c:v>
+          </c:tx>
+          <c:spPr>
+            <a:solidFill>
+              <a:schemeClr val="accent2"/>
+            </a:solidFill>
+            <a:ln>
+              <a:noFill/>
+            </a:ln>
+            <a:effectLst/>
+          </c:spPr>
+          <c:invertIfNegative val="0"/>
+          <c:cat>
+            <c:strRef>
+              <c:f>Аркуш1!$A$3:$A$8</c:f>
+              <c:strCache>
+                <c:ptCount val="6"/>
+                <c:pt idx="0">
+                  <c:v> Short Polling </c:v>
+                </c:pt>
+                <c:pt idx="1">
+                  <c:v> HTTP Long Polling </c:v>
+                </c:pt>
+                <c:pt idx="2">
+                  <c:v> Server-Sent Events </c:v>
+                </c:pt>
+                <c:pt idx="3">
+                  <c:v> WebSocket </c:v>
+                </c:pt>
+                <c:pt idx="4">
+                  <c:v> Socket.IO </c:v>
+                </c:pt>
+                <c:pt idx="5">
+                  <c:v> GraphQL Subscriptions </c:v>
+                </c:pt>
+              </c:strCache>
+            </c:strRef>
+          </c:cat>
+          <c:val>
+            <c:numRef>
+              <c:f>Аркуш1!$C$3:$C$8</c:f>
+              <c:numCache>
+                <c:formatCode>General</c:formatCode>
+                <c:ptCount val="6"/>
+                <c:pt idx="0">
+                  <c:v>992.01</c:v>
+                </c:pt>
+                <c:pt idx="1">
+                  <c:v>2.44</c:v>
+                </c:pt>
+                <c:pt idx="2">
+                  <c:v>0.68</c:v>
+                </c:pt>
+                <c:pt idx="3">
+                  <c:v>0.54</c:v>
+                </c:pt>
+                <c:pt idx="4">
+                  <c:v>0.72</c:v>
+                </c:pt>
+                <c:pt idx="5">
+                  <c:v>0.54</c:v>
+                </c:pt>
+              </c:numCache>
+            </c:numRef>
+          </c:val>
+          <c:extLst>
+            <c:ext xmlns:c16="http://schemas.microsoft.com/office/drawing/2014/chart" uri="{C3380CC4-5D6E-409C-BE32-E72D297353CC}">
+              <c16:uniqueId val="{00000001-5278-4FC3-943F-02C70D0B1151}"/>
+            </c:ext>
+          </c:extLst>
+        </c:ser>
+        <c:ser>
+          <c:idx val="2"/>
+          <c:order val="2"/>
+          <c:tx>
+            <c:v>Сценарій 3</c:v>
+          </c:tx>
+          <c:spPr>
+            <a:solidFill>
+              <a:schemeClr val="accent3"/>
+            </a:solidFill>
+            <a:ln>
+              <a:noFill/>
+            </a:ln>
+            <a:effectLst/>
+          </c:spPr>
+          <c:invertIfNegative val="0"/>
+          <c:cat>
+            <c:strRef>
+              <c:f>Аркуш1!$A$3:$A$8</c:f>
+              <c:strCache>
+                <c:ptCount val="6"/>
+                <c:pt idx="0">
+                  <c:v> Short Polling </c:v>
+                </c:pt>
+                <c:pt idx="1">
+                  <c:v> HTTP Long Polling </c:v>
+                </c:pt>
+                <c:pt idx="2">
+                  <c:v> Server-Sent Events </c:v>
+                </c:pt>
+                <c:pt idx="3">
+                  <c:v> WebSocket </c:v>
+                </c:pt>
+                <c:pt idx="4">
+                  <c:v> Socket.IO </c:v>
+                </c:pt>
+                <c:pt idx="5">
+                  <c:v> GraphQL Subscriptions </c:v>
+                </c:pt>
+              </c:strCache>
+            </c:strRef>
+          </c:cat>
+          <c:val>
+            <c:numRef>
+              <c:f>Аркуш1!$D$3:$D$8</c:f>
+              <c:numCache>
+                <c:formatCode>General</c:formatCode>
+                <c:ptCount val="6"/>
+                <c:pt idx="0">
+                  <c:v>51.04</c:v>
+                </c:pt>
+                <c:pt idx="1">
+                  <c:v>5.53</c:v>
+                </c:pt>
+                <c:pt idx="2">
+                  <c:v>1.69</c:v>
+                </c:pt>
+                <c:pt idx="3">
+                  <c:v>0.71</c:v>
+                </c:pt>
+                <c:pt idx="4">
+                  <c:v>0.97</c:v>
+                </c:pt>
+                <c:pt idx="5">
+                  <c:v>0.96</c:v>
+                </c:pt>
+              </c:numCache>
+            </c:numRef>
+          </c:val>
+          <c:extLst>
+            <c:ext xmlns:c16="http://schemas.microsoft.com/office/drawing/2014/chart" uri="{C3380CC4-5D6E-409C-BE32-E72D297353CC}">
+              <c16:uniqueId val="{00000002-5278-4FC3-943F-02C70D0B1151}"/>
+            </c:ext>
+          </c:extLst>
+        </c:ser>
+        <c:dLbls>
+          <c:showLegendKey val="0"/>
+          <c:showVal val="0"/>
+          <c:showCatName val="0"/>
+          <c:showSerName val="0"/>
+          <c:showPercent val="0"/>
+          <c:showBubbleSize val="0"/>
+        </c:dLbls>
+        <c:gapWidth val="219"/>
+        <c:overlap val="-27"/>
+        <c:axId val="397472512"/>
+        <c:axId val="414364032"/>
+      </c:barChart>
+      <c:catAx>
+        <c:axId val="397472512"/>
+        <c:scaling>
+          <c:orientation val="minMax"/>
+        </c:scaling>
+        <c:delete val="0"/>
+        <c:axPos val="b"/>
+        <c:numFmt formatCode="General" sourceLinked="1"/>
+        <c:majorTickMark val="none"/>
+        <c:minorTickMark val="none"/>
+        <c:tickLblPos val="nextTo"/>
+        <c:spPr>
+          <a:noFill/>
+          <a:ln w="9525" cap="flat" cmpd="sng" algn="ctr">
+            <a:solidFill>
+              <a:schemeClr val="tx1">
+                <a:lumMod val="15000"/>
+                <a:lumOff val="85000"/>
+              </a:schemeClr>
+            </a:solidFill>
+            <a:round/>
+          </a:ln>
+          <a:effectLst/>
+        </c:spPr>
+        <c:txPr>
+          <a:bodyPr rot="-60000000" spcFirstLastPara="1" vertOverflow="ellipsis" vert="horz" wrap="square" anchor="ctr" anchorCtr="1"/>
+          <a:lstStyle/>
+          <a:p>
+            <a:pPr>
+              <a:defRPr sz="900" b="0" i="0" u="none" strike="noStrike" kern="1200" baseline="0">
+                <a:solidFill>
+                  <a:schemeClr val="tx1">
+                    <a:lumMod val="65000"/>
+                    <a:lumOff val="35000"/>
+                  </a:schemeClr>
+                </a:solidFill>
+                <a:latin typeface="+mn-lt"/>
+                <a:ea typeface="+mn-ea"/>
+                <a:cs typeface="+mn-cs"/>
+              </a:defRPr>
+            </a:pPr>
+            <a:endParaRPr lang="ru-RU"/>
+          </a:p>
+        </c:txPr>
+        <c:crossAx val="414364032"/>
+        <c:crossesAt val="0.1"/>
+        <c:auto val="1"/>
+        <c:lblAlgn val="ctr"/>
+        <c:lblOffset val="100"/>
+        <c:noMultiLvlLbl val="0"/>
+      </c:catAx>
+      <c:valAx>
+        <c:axId val="414364032"/>
+        <c:scaling>
+          <c:logBase val="2"/>
+          <c:orientation val="minMax"/>
+        </c:scaling>
+        <c:delete val="0"/>
+        <c:axPos val="l"/>
+        <c:majorGridlines>
+          <c:spPr>
+            <a:ln w="9525" cap="flat" cmpd="sng" algn="ctr">
+              <a:solidFill>
+                <a:schemeClr val="tx1">
+                  <a:lumMod val="15000"/>
+                  <a:lumOff val="85000"/>
+                </a:schemeClr>
+              </a:solidFill>
+              <a:round/>
+            </a:ln>
+            <a:effectLst/>
+          </c:spPr>
+        </c:majorGridlines>
+        <c:numFmt formatCode="General" sourceLinked="1"/>
+        <c:majorTickMark val="none"/>
+        <c:minorTickMark val="none"/>
+        <c:tickLblPos val="nextTo"/>
+        <c:spPr>
+          <a:noFill/>
+          <a:ln>
+            <a:noFill/>
+          </a:ln>
+          <a:effectLst/>
+        </c:spPr>
+        <c:txPr>
+          <a:bodyPr rot="-60000000" spcFirstLastPara="1" vertOverflow="ellipsis" vert="horz" wrap="square" anchor="ctr" anchorCtr="1"/>
+          <a:lstStyle/>
+          <a:p>
+            <a:pPr>
+              <a:defRPr sz="900" b="0" i="0" u="none" strike="noStrike" kern="1200" baseline="0">
+                <a:solidFill>
+                  <a:schemeClr val="tx1">
+                    <a:lumMod val="65000"/>
+                    <a:lumOff val="35000"/>
+                  </a:schemeClr>
+                </a:solidFill>
+                <a:latin typeface="+mn-lt"/>
+                <a:ea typeface="+mn-ea"/>
+                <a:cs typeface="+mn-cs"/>
+              </a:defRPr>
+            </a:pPr>
+            <a:endParaRPr lang="ru-RU"/>
+          </a:p>
+        </c:txPr>
+        <c:crossAx val="397472512"/>
+        <c:crosses val="autoZero"/>
+        <c:crossBetween val="between"/>
+      </c:valAx>
+      <c:spPr>
+        <a:noFill/>
+        <a:ln>
+          <a:noFill/>
+        </a:ln>
+        <a:effectLst/>
+      </c:spPr>
+    </c:plotArea>
+    <c:legend>
+      <c:legendPos val="b"/>
+      <c:overlay val="0"/>
+      <c:spPr>
+        <a:noFill/>
+        <a:ln>
+          <a:noFill/>
+        </a:ln>
+        <a:effectLst/>
+      </c:spPr>
+      <c:txPr>
+        <a:bodyPr rot="0" spcFirstLastPara="1" vertOverflow="ellipsis" vert="horz" wrap="square" anchor="ctr" anchorCtr="1"/>
+        <a:lstStyle/>
+        <a:p>
+          <a:pPr>
+            <a:defRPr sz="900" b="0" i="0" u="none" strike="noStrike" kern="1200" baseline="0">
+              <a:solidFill>
+                <a:schemeClr val="tx1">
+                  <a:lumMod val="65000"/>
+                  <a:lumOff val="35000"/>
+                </a:schemeClr>
+              </a:solidFill>
+              <a:latin typeface="+mn-lt"/>
+              <a:ea typeface="+mn-ea"/>
+              <a:cs typeface="+mn-cs"/>
+            </a:defRPr>
+          </a:pPr>
+          <a:endParaRPr lang="ru-RU"/>
+        </a:p>
+      </c:txPr>
+    </c:legend>
+    <c:plotVisOnly val="1"/>
+    <c:dispBlanksAs val="gap"/>
+    <c:showDLblsOverMax val="0"/>
+    <c:extLst>
+      <c:ext xmlns:c16r3="http://schemas.microsoft.com/office/drawing/2017/03/chart" uri="{56B9EC1D-385E-4148-901F-78D8002777C0}">
+        <c16r3:dataDisplayOptions16>
+          <c16r3:dispNaAsBlank val="1"/>
+        </c16r3:dataDisplayOptions16>
+      </c:ext>
+    </c:extLst>
+  </c:chart>
+  <c:spPr>
+    <a:solidFill>
+      <a:schemeClr val="bg1"/>
+    </a:solidFill>
+    <a:ln w="9525" cap="flat" cmpd="sng" algn="ctr">
+      <a:solidFill>
+        <a:schemeClr val="tx1">
+          <a:lumMod val="15000"/>
+          <a:lumOff val="85000"/>
+        </a:schemeClr>
+      </a:solidFill>
+      <a:round/>
+    </a:ln>
+    <a:effectLst/>
+  </c:spPr>
+  <c:txPr>
+    <a:bodyPr/>
+    <a:lstStyle/>
+    <a:p>
+      <a:pPr>
+        <a:defRPr/>
+      </a:pPr>
+      <a:endParaRPr lang="ru-RU"/>
+    </a:p>
+  </c:txPr>
+  <c:externalData r:id="rId1">
+    <c:autoUpdate val="0"/>
+  </c:externalData>
+</c:chartSpace>
+</file>
+
+<file path=ppt/charts/chart3.xml><?xml version="1.0" encoding="utf-8"?>
+<c:chartSpace xmlns:c="http://schemas.openxmlformats.org/drawingml/2006/chart" xmlns:a="http://schemas.openxmlformats.org/drawingml/2006/main" xmlns:r="http://schemas.openxmlformats.org/officeDocument/2006/relationships" xmlns:c16r2="http://schemas.microsoft.com/office/drawing/2015/06/chart">
+  <c:date1904 val="0"/>
+  <c:lang val="uk-UA"/>
+  <c:roundedCorners val="0"/>
+  <mc:AlternateContent xmlns:mc="http://schemas.openxmlformats.org/markup-compatibility/2006">
+    <mc:Choice xmlns:c14="http://schemas.microsoft.com/office/drawing/2007/8/2/chart" Requires="c14">
+      <c14:style val="102"/>
+    </mc:Choice>
+    <mc:Fallback>
+      <c:style val="2"/>
+    </mc:Fallback>
+  </mc:AlternateContent>
+  <c:chart>
+    <c:title>
+      <c:tx>
+        <c:rich>
+          <a:bodyPr rot="0" spcFirstLastPara="1" vertOverflow="ellipsis" vert="horz" wrap="square" anchor="ctr" anchorCtr="1"/>
+          <a:lstStyle/>
+          <a:p>
+            <a:pPr>
+              <a:defRPr sz="1400" b="0" i="0" u="none" strike="noStrike" kern="1200" spc="0" baseline="0">
+                <a:solidFill>
+                  <a:schemeClr val="tx1">
+                    <a:lumMod val="65000"/>
+                    <a:lumOff val="35000"/>
+                  </a:schemeClr>
+                </a:solidFill>
+                <a:latin typeface="+mn-lt"/>
+                <a:ea typeface="+mn-ea"/>
+                <a:cs typeface="+mn-cs"/>
+              </a:defRPr>
+            </a:pPr>
+            <a:r>
+              <a:rPr lang="uk-UA"/>
+              <a:t>Кількість витраченого</a:t>
+            </a:r>
+            <a:r>
+              <a:rPr lang="uk-UA" baseline="0"/>
+              <a:t> трафіку на повідомлення</a:t>
+            </a:r>
+            <a:endParaRPr lang="uk-UA"/>
+          </a:p>
+        </c:rich>
+      </c:tx>
+      <c:overlay val="0"/>
+      <c:spPr>
+        <a:noFill/>
+        <a:ln>
+          <a:noFill/>
+        </a:ln>
+        <a:effectLst/>
+      </c:spPr>
+    </c:title>
+    <c:autoTitleDeleted val="0"/>
+    <c:plotArea>
+      <c:layout/>
+      <c:barChart>
+        <c:barDir val="col"/>
+        <c:grouping val="clustered"/>
+        <c:varyColors val="0"/>
+        <c:ser>
+          <c:idx val="0"/>
+          <c:order val="0"/>
+          <c:tx>
+            <c:v>Сценарій 1</c:v>
+          </c:tx>
+          <c:spPr>
+            <a:solidFill>
+              <a:schemeClr val="accent1"/>
+            </a:solidFill>
+            <a:ln>
+              <a:noFill/>
+            </a:ln>
+            <a:effectLst/>
+          </c:spPr>
+          <c:invertIfNegative val="0"/>
+          <c:cat>
+            <c:strRef>
+              <c:f>Аркуш1!$A$13:$A$18</c:f>
+              <c:strCache>
+                <c:ptCount val="6"/>
+                <c:pt idx="0">
+                  <c:v> Short Polling </c:v>
+                </c:pt>
+                <c:pt idx="1">
+                  <c:v> HTTP Long Polling </c:v>
+                </c:pt>
+                <c:pt idx="2">
+                  <c:v> Server-Sent Events </c:v>
+                </c:pt>
+                <c:pt idx="3">
+                  <c:v> WebSocket </c:v>
+                </c:pt>
+                <c:pt idx="4">
+                  <c:v> Socket.IO </c:v>
+                </c:pt>
+                <c:pt idx="5">
+                  <c:v> GraphQL Subscriptions </c:v>
+                </c:pt>
+              </c:strCache>
+            </c:strRef>
+          </c:cat>
+          <c:val>
+            <c:numRef>
+              <c:f>Аркуш1!$B$13:$B$18</c:f>
+              <c:numCache>
+                <c:formatCode>General</c:formatCode>
+                <c:ptCount val="6"/>
+                <c:pt idx="0">
+                  <c:v>64</c:v>
+                </c:pt>
+                <c:pt idx="1">
+                  <c:v>64</c:v>
+                </c:pt>
+                <c:pt idx="2">
+                  <c:v>72</c:v>
+                </c:pt>
+                <c:pt idx="3">
+                  <c:v>64</c:v>
+                </c:pt>
+                <c:pt idx="4">
+                  <c:v>64</c:v>
+                </c:pt>
+                <c:pt idx="5">
+                  <c:v>89</c:v>
+                </c:pt>
+              </c:numCache>
+            </c:numRef>
+          </c:val>
+          <c:extLst>
+            <c:ext xmlns:c16="http://schemas.microsoft.com/office/drawing/2014/chart" uri="{C3380CC4-5D6E-409C-BE32-E72D297353CC}">
+              <c16:uniqueId val="{00000000-212D-49D8-8BCA-CACD903FAD60}"/>
+            </c:ext>
+          </c:extLst>
+        </c:ser>
+        <c:ser>
+          <c:idx val="1"/>
+          <c:order val="1"/>
+          <c:tx>
+            <c:v>Сценарій 2</c:v>
+          </c:tx>
+          <c:spPr>
+            <a:solidFill>
+              <a:schemeClr val="accent2"/>
+            </a:solidFill>
+            <a:ln>
+              <a:noFill/>
+            </a:ln>
+            <a:effectLst/>
+          </c:spPr>
+          <c:invertIfNegative val="0"/>
+          <c:cat>
+            <c:strRef>
+              <c:f>Аркуш1!$A$13:$A$18</c:f>
+              <c:strCache>
+                <c:ptCount val="6"/>
+                <c:pt idx="0">
+                  <c:v> Short Polling </c:v>
+                </c:pt>
+                <c:pt idx="1">
+                  <c:v> HTTP Long Polling </c:v>
+                </c:pt>
+                <c:pt idx="2">
+                  <c:v> Server-Sent Events </c:v>
+                </c:pt>
+                <c:pt idx="3">
+                  <c:v> WebSocket </c:v>
+                </c:pt>
+                <c:pt idx="4">
+                  <c:v> Socket.IO </c:v>
+                </c:pt>
+                <c:pt idx="5">
+                  <c:v> GraphQL Subscriptions </c:v>
+                </c:pt>
+              </c:strCache>
+            </c:strRef>
+          </c:cat>
+          <c:val>
+            <c:numRef>
+              <c:f>Аркуш1!$C$13:$C$18</c:f>
+              <c:numCache>
+                <c:formatCode>General</c:formatCode>
+                <c:ptCount val="6"/>
+                <c:pt idx="0">
+                  <c:v>64</c:v>
+                </c:pt>
+                <c:pt idx="1">
+                  <c:v>64</c:v>
+                </c:pt>
+                <c:pt idx="2">
+                  <c:v>74</c:v>
+                </c:pt>
+                <c:pt idx="3">
+                  <c:v>64</c:v>
+                </c:pt>
+                <c:pt idx="4">
+                  <c:v>64</c:v>
+                </c:pt>
+                <c:pt idx="5">
+                  <c:v>89</c:v>
+                </c:pt>
+              </c:numCache>
+            </c:numRef>
+          </c:val>
+          <c:extLst>
+            <c:ext xmlns:c16="http://schemas.microsoft.com/office/drawing/2014/chart" uri="{C3380CC4-5D6E-409C-BE32-E72D297353CC}">
+              <c16:uniqueId val="{00000001-212D-49D8-8BCA-CACD903FAD60}"/>
+            </c:ext>
+          </c:extLst>
+        </c:ser>
+        <c:ser>
+          <c:idx val="2"/>
+          <c:order val="2"/>
+          <c:tx>
+            <c:v>Сценарій 3</c:v>
+          </c:tx>
+          <c:spPr>
+            <a:solidFill>
+              <a:schemeClr val="accent3"/>
+            </a:solidFill>
+            <a:ln>
+              <a:noFill/>
+            </a:ln>
+            <a:effectLst/>
+          </c:spPr>
+          <c:invertIfNegative val="0"/>
+          <c:cat>
+            <c:strRef>
+              <c:f>Аркуш1!$A$13:$A$18</c:f>
+              <c:strCache>
+                <c:ptCount val="6"/>
+                <c:pt idx="0">
+                  <c:v> Short Polling </c:v>
+                </c:pt>
+                <c:pt idx="1">
+                  <c:v> HTTP Long Polling </c:v>
+                </c:pt>
+                <c:pt idx="2">
+                  <c:v> Server-Sent Events </c:v>
+                </c:pt>
+                <c:pt idx="3">
+                  <c:v> WebSocket </c:v>
+                </c:pt>
+                <c:pt idx="4">
+                  <c:v> Socket.IO </c:v>
+                </c:pt>
+                <c:pt idx="5">
+                  <c:v> GraphQL Subscriptions </c:v>
+                </c:pt>
+              </c:strCache>
+            </c:strRef>
+          </c:cat>
+          <c:val>
+            <c:numRef>
+              <c:f>Аркуш1!$D$13:$D$18</c:f>
+              <c:numCache>
+                <c:formatCode>General</c:formatCode>
+                <c:ptCount val="6"/>
+                <c:pt idx="0">
+                  <c:v>64</c:v>
+                </c:pt>
+                <c:pt idx="1">
+                  <c:v>64</c:v>
+                </c:pt>
+                <c:pt idx="2">
+                  <c:v>72</c:v>
+                </c:pt>
+                <c:pt idx="3">
+                  <c:v>11</c:v>
+                </c:pt>
+                <c:pt idx="4">
+                  <c:v>11</c:v>
+                </c:pt>
+                <c:pt idx="5">
+                  <c:v>15</c:v>
+                </c:pt>
+              </c:numCache>
+            </c:numRef>
+          </c:val>
+          <c:extLst>
+            <c:ext xmlns:c16="http://schemas.microsoft.com/office/drawing/2014/chart" uri="{C3380CC4-5D6E-409C-BE32-E72D297353CC}">
+              <c16:uniqueId val="{00000002-212D-49D8-8BCA-CACD903FAD60}"/>
+            </c:ext>
+          </c:extLst>
+        </c:ser>
+        <c:dLbls>
+          <c:showLegendKey val="0"/>
+          <c:showVal val="0"/>
+          <c:showCatName val="0"/>
+          <c:showSerName val="0"/>
+          <c:showPercent val="0"/>
+          <c:showBubbleSize val="0"/>
+        </c:dLbls>
+        <c:gapWidth val="219"/>
+        <c:overlap val="-27"/>
+        <c:axId val="200733056"/>
+        <c:axId val="200734592"/>
+      </c:barChart>
+      <c:catAx>
+        <c:axId val="200733056"/>
+        <c:scaling>
+          <c:orientation val="minMax"/>
+        </c:scaling>
+        <c:delete val="0"/>
+        <c:axPos val="b"/>
+        <c:numFmt formatCode="General" sourceLinked="1"/>
+        <c:majorTickMark val="none"/>
+        <c:minorTickMark val="none"/>
+        <c:tickLblPos val="nextTo"/>
+        <c:spPr>
+          <a:noFill/>
+          <a:ln w="9525" cap="flat" cmpd="sng" algn="ctr">
+            <a:solidFill>
+              <a:schemeClr val="tx1">
+                <a:lumMod val="15000"/>
+                <a:lumOff val="85000"/>
+              </a:schemeClr>
+            </a:solidFill>
+            <a:round/>
+          </a:ln>
+          <a:effectLst/>
+        </c:spPr>
+        <c:txPr>
+          <a:bodyPr rot="-60000000" spcFirstLastPara="1" vertOverflow="ellipsis" vert="horz" wrap="square" anchor="ctr" anchorCtr="1"/>
+          <a:lstStyle/>
+          <a:p>
+            <a:pPr>
+              <a:defRPr sz="900" b="0" i="0" u="none" strike="noStrike" kern="1200" baseline="0">
+                <a:solidFill>
+                  <a:schemeClr val="tx1">
+                    <a:lumMod val="65000"/>
+                    <a:lumOff val="35000"/>
+                  </a:schemeClr>
+                </a:solidFill>
+                <a:latin typeface="+mn-lt"/>
+                <a:ea typeface="+mn-ea"/>
+                <a:cs typeface="+mn-cs"/>
+              </a:defRPr>
+            </a:pPr>
+            <a:endParaRPr lang="ru-RU"/>
+          </a:p>
+        </c:txPr>
+        <c:crossAx val="200734592"/>
+        <c:crosses val="autoZero"/>
+        <c:auto val="1"/>
+        <c:lblAlgn val="ctr"/>
+        <c:lblOffset val="100"/>
+        <c:noMultiLvlLbl val="0"/>
+      </c:catAx>
+      <c:valAx>
+        <c:axId val="200734592"/>
+        <c:scaling>
+          <c:orientation val="minMax"/>
+        </c:scaling>
+        <c:delete val="0"/>
+        <c:axPos val="l"/>
+        <c:majorGridlines>
+          <c:spPr>
+            <a:ln w="9525" cap="flat" cmpd="sng" algn="ctr">
+              <a:solidFill>
+                <a:schemeClr val="tx1">
+                  <a:lumMod val="15000"/>
+                  <a:lumOff val="85000"/>
+                </a:schemeClr>
+              </a:solidFill>
+              <a:round/>
+            </a:ln>
+            <a:effectLst/>
+          </c:spPr>
+        </c:majorGridlines>
+        <c:numFmt formatCode="General" sourceLinked="1"/>
+        <c:majorTickMark val="none"/>
+        <c:minorTickMark val="none"/>
+        <c:tickLblPos val="nextTo"/>
+        <c:spPr>
+          <a:noFill/>
+          <a:ln>
+            <a:noFill/>
+          </a:ln>
+          <a:effectLst/>
+        </c:spPr>
+        <c:txPr>
+          <a:bodyPr rot="-60000000" spcFirstLastPara="1" vertOverflow="ellipsis" vert="horz" wrap="square" anchor="ctr" anchorCtr="1"/>
+          <a:lstStyle/>
+          <a:p>
+            <a:pPr>
+              <a:defRPr sz="900" b="0" i="0" u="none" strike="noStrike" kern="1200" baseline="0">
+                <a:solidFill>
+                  <a:schemeClr val="tx1">
+                    <a:lumMod val="65000"/>
+                    <a:lumOff val="35000"/>
+                  </a:schemeClr>
+                </a:solidFill>
+                <a:latin typeface="+mn-lt"/>
+                <a:ea typeface="+mn-ea"/>
+                <a:cs typeface="+mn-cs"/>
+              </a:defRPr>
+            </a:pPr>
+            <a:endParaRPr lang="ru-RU"/>
+          </a:p>
+        </c:txPr>
+        <c:crossAx val="200733056"/>
+        <c:crosses val="autoZero"/>
+        <c:crossBetween val="between"/>
+      </c:valAx>
+      <c:spPr>
+        <a:noFill/>
+        <a:ln>
+          <a:noFill/>
+        </a:ln>
+        <a:effectLst/>
+      </c:spPr>
+    </c:plotArea>
+    <c:legend>
+      <c:legendPos val="b"/>
+      <c:overlay val="0"/>
+      <c:spPr>
+        <a:noFill/>
+        <a:ln>
+          <a:noFill/>
+        </a:ln>
+        <a:effectLst/>
+      </c:spPr>
+      <c:txPr>
+        <a:bodyPr rot="0" spcFirstLastPara="1" vertOverflow="ellipsis" vert="horz" wrap="square" anchor="ctr" anchorCtr="1"/>
+        <a:lstStyle/>
+        <a:p>
+          <a:pPr>
+            <a:defRPr sz="900" b="0" i="0" u="none" strike="noStrike" kern="1200" baseline="0">
+              <a:solidFill>
+                <a:schemeClr val="tx1">
+                  <a:lumMod val="65000"/>
+                  <a:lumOff val="35000"/>
+                </a:schemeClr>
+              </a:solidFill>
+              <a:latin typeface="+mn-lt"/>
+              <a:ea typeface="+mn-ea"/>
+              <a:cs typeface="+mn-cs"/>
+            </a:defRPr>
+          </a:pPr>
+          <a:endParaRPr lang="ru-RU"/>
+        </a:p>
+      </c:txPr>
+    </c:legend>
+    <c:plotVisOnly val="1"/>
+    <c:dispBlanksAs val="gap"/>
+    <c:showDLblsOverMax val="0"/>
+    <c:extLst>
+      <c:ext xmlns:c16r3="http://schemas.microsoft.com/office/drawing/2017/03/chart" uri="{56B9EC1D-385E-4148-901F-78D8002777C0}">
+        <c16r3:dataDisplayOptions16>
+          <c16r3:dispNaAsBlank val="1"/>
+        </c16r3:dataDisplayOptions16>
+      </c:ext>
+    </c:extLst>
+  </c:chart>
+  <c:spPr>
+    <a:solidFill>
+      <a:schemeClr val="bg1"/>
+    </a:solidFill>
+    <a:ln w="9525" cap="flat" cmpd="sng" algn="ctr">
+      <a:solidFill>
+        <a:schemeClr val="tx1">
+          <a:lumMod val="15000"/>
+          <a:lumOff val="85000"/>
+        </a:schemeClr>
+      </a:solidFill>
+      <a:round/>
+    </a:ln>
+    <a:effectLst/>
+  </c:spPr>
+  <c:txPr>
+    <a:bodyPr/>
+    <a:lstStyle/>
+    <a:p>
+      <a:pPr>
+        <a:defRPr/>
+      </a:pPr>
+      <a:endParaRPr lang="ru-RU"/>
+    </a:p>
+  </c:txPr>
+  <c:externalData r:id="rId1">
+    <c:autoUpdate val="0"/>
+  </c:externalData>
+</c:chartSpace>
+</file>
+
 <file path=ppt/notesMasters/notesMaster1.xml><?xml version="1.0" encoding="utf-8"?>
 <p:notesMaster xmlns:a="http://schemas.openxmlformats.org/drawingml/2006/main" xmlns:r="http://schemas.openxmlformats.org/officeDocument/2006/relationships" xmlns:p="http://schemas.openxmlformats.org/presentationml/2006/main">
   <p:cSld>
@@ -516,14 +1495,20 @@
           <a:lstStyle/>
           <a:p>
             <a:r>
+              <a:rPr lang="uk-UA" dirty="0"/>
+              <a:t>Доброго дня! До вашої уваги пропонується робота на тему: «Дослідження технологій обміну даними у реальному часі між клієнтом та сервером та побудова моделі оцінки їх продуктивності у </a:t>
+            </a:r>
+            <a:r>
+              <a:rPr lang="uk-UA" dirty="0" err="1"/>
+              <a:t>вебзастосунках</a:t>
+            </a:r>
+            <a:r>
+              <a:rPr lang="uk-UA" dirty="0"/>
+              <a:t>». Основна ідея дослідження полягає в тому, щоб на одній задачі порівняти шість різних технологій доставки подій та за допомогою математичного апарату обґрунтувати вибір найкращої технології</a:t>
+            </a:r>
+            <a:r>
               <a:rPr lang="en-US" dirty="0"/>
               <a:t>
-[Sources]
-- https://datatracker.ietf.org/doc/html/rfc6455 (WebSocket RFC 6455)
-- https://html.spec.whatwg.org/multipage/server-sent-events.html (SSE in HTML Standard)
-- https://socket.io/docs/v4/ (Socket.IO docs)
-- https://graphql.org/learn/subscriptions/ (GraphQL Subscriptions overview)
-[/Sources]
   </a:t>
             </a:r>
           </a:p>
@@ -570,6 +1555,401 @@
   <p:cSld>
     <p:spTree>
       <p:nvGrpSpPr>
+        <p:cNvPr id="1" name="">
+          <a:extLst>
+            <a:ext uri="{FF2B5EF4-FFF2-40B4-BE49-F238E27FC236}">
+              <a16:creationId xmlns:a16="http://schemas.microsoft.com/office/drawing/2014/main" id="{18C59A11-4164-5605-00D9-3951D8E1F865}"/>
+            </a:ext>
+          </a:extLst>
+        </p:cNvPr>
+        <p:cNvGrpSpPr/>
+        <p:nvPr/>
+      </p:nvGrpSpPr>
+      <p:grpSpPr>
+        <a:xfrm>
+          <a:off x="0" y="0"/>
+          <a:ext cx="0" cy="0"/>
+          <a:chOff x="0" y="0"/>
+          <a:chExt cx="0" cy="0"/>
+        </a:xfrm>
+      </p:grpSpPr>
+      <p:sp>
+        <p:nvSpPr>
+          <p:cNvPr id="2" name="Slide Image Placeholder 1">
+            <a:extLst>
+              <a:ext uri="{FF2B5EF4-FFF2-40B4-BE49-F238E27FC236}">
+                <a16:creationId xmlns:a16="http://schemas.microsoft.com/office/drawing/2014/main" id="{BC625080-03AF-AA87-6E31-30BA26729FCE}"/>
+              </a:ext>
+            </a:extLst>
+          </p:cNvPr>
+          <p:cNvSpPr>
+            <a:spLocks noGrp="1" noRot="1" noChangeAspect="1"/>
+          </p:cNvSpPr>
+          <p:nvPr>
+            <p:ph type="sldImg"/>
+          </p:nvPr>
+        </p:nvSpPr>
+        <p:spPr/>
+      </p:sp>
+      <p:sp>
+        <p:nvSpPr>
+          <p:cNvPr id="3" name="Notes Placeholder 2">
+            <a:extLst>
+              <a:ext uri="{FF2B5EF4-FFF2-40B4-BE49-F238E27FC236}">
+                <a16:creationId xmlns:a16="http://schemas.microsoft.com/office/drawing/2014/main" id="{5B39404A-3B29-6485-C569-5B2AF6B82252}"/>
+              </a:ext>
+            </a:extLst>
+          </p:cNvPr>
+          <p:cNvSpPr>
+            <a:spLocks noGrp="1"/>
+          </p:cNvSpPr>
+          <p:nvPr>
+            <p:ph type="body" idx="1"/>
+          </p:nvPr>
+        </p:nvSpPr>
+        <p:spPr/>
+        <p:txBody>
+          <a:bodyPr/>
+          <a:lstStyle/>
+          <a:p>
+            <a:pPr marL="0" marR="0" lvl="0" indent="0" algn="l" defTabSz="914400" rtl="0" eaLnBrk="1" fontAlgn="auto" latinLnBrk="0" hangingPunct="1">
+              <a:lnSpc>
+                <a:spcPct val="100000"/>
+              </a:lnSpc>
+              <a:spcBef>
+                <a:spcPts val="0"/>
+              </a:spcBef>
+              <a:spcAft>
+                <a:spcPts val="0"/>
+              </a:spcAft>
+              <a:buClrTx/>
+              <a:buSzTx/>
+              <a:buFontTx/>
+              <a:buNone/>
+              <a:tabLst/>
+              <a:defRPr/>
+            </a:pPr>
+            <a:r>
+              <a:rPr lang="uk-UA" sz="1200" b="0" noProof="1">
+                <a:solidFill>
+                  <a:srgbClr val="0F172A"/>
+                </a:solidFill>
+                <a:latin typeface="Calibri" pitchFamily="34" charset="0"/>
+                <a:ea typeface="Calibri" pitchFamily="34" charset="-122"/>
+                <a:cs typeface="Calibri" pitchFamily="34" charset="-120"/>
+              </a:rPr>
+              <a:t>Результати практичного експерименту представлені як два порівняльні графіки: середньої затримки доставки повідомлення та середнього використаного мережевого трафіку. Синім кольором продемострований сценарій швидких оновлень для одного клієнта, оранжевий колір представляє сценарій рідких оновлень для одного клієнта та сірий колір представляй сценарій, де одразу декілька клієнтів отримують часто оновлення.</a:t>
+            </a:r>
+          </a:p>
+          <a:p>
+            <a:pPr marL="0" marR="0" lvl="0" indent="0" algn="l" defTabSz="914400" rtl="0" eaLnBrk="1" fontAlgn="auto" latinLnBrk="0" hangingPunct="1">
+              <a:lnSpc>
+                <a:spcPct val="100000"/>
+              </a:lnSpc>
+              <a:spcBef>
+                <a:spcPts val="0"/>
+              </a:spcBef>
+              <a:spcAft>
+                <a:spcPts val="0"/>
+              </a:spcAft>
+              <a:buClrTx/>
+              <a:buSzTx/>
+              <a:buFontTx/>
+              <a:buNone/>
+              <a:tabLst/>
+              <a:defRPr/>
+            </a:pPr>
+            <a:r>
+              <a:rPr lang="uk-UA" dirty="0"/>
+              <a:t>Спочатку оглянемо графік середньої затримки. Практичні вимірювання підтвердили критичну слабкість </a:t>
+            </a:r>
+            <a:r>
+              <a:rPr lang="en-US" dirty="0"/>
+              <a:t>Polling-</a:t>
+            </a:r>
+            <a:r>
+              <a:rPr lang="uk-UA" dirty="0"/>
+              <a:t>технологій. У сценарії з рідкими подіями затримка </a:t>
+            </a:r>
+            <a:r>
+              <a:rPr lang="en-US" dirty="0"/>
+              <a:t>Short Polling </a:t>
+            </a:r>
+            <a:r>
+              <a:rPr lang="uk-UA" dirty="0"/>
+              <a:t>сягала майже однієї секунди. Натомість група </a:t>
+            </a:r>
+            <a:r>
+              <a:rPr lang="en-US" dirty="0"/>
+              <a:t>Persistent-</a:t>
+            </a:r>
+            <a:r>
+              <a:rPr lang="uk-UA" dirty="0"/>
+              <a:t>каналів (</a:t>
+            </a:r>
+            <a:r>
+              <a:rPr lang="en-US" dirty="0"/>
+              <a:t>SSE, WebSocket, Socket.IO) </a:t>
+            </a:r>
+            <a:r>
+              <a:rPr lang="uk-UA" dirty="0"/>
+              <a:t>продемонструвала стабільно низькі показники — в середньому менше 2 </a:t>
+            </a:r>
+            <a:r>
+              <a:rPr lang="uk-UA" dirty="0" err="1"/>
+              <a:t>мілісекунд</a:t>
+            </a:r>
+            <a:r>
+              <a:rPr lang="uk-UA" dirty="0"/>
+              <a:t>, незалежно від сценарію. Важливо зазначити, що додаткова логіка </a:t>
+            </a:r>
+            <a:r>
+              <a:rPr lang="en-US" dirty="0" err="1"/>
+              <a:t>GraphQL</a:t>
+            </a:r>
+            <a:r>
+              <a:rPr lang="en-US" dirty="0"/>
+              <a:t> Subscriptions </a:t>
+            </a:r>
+            <a:r>
+              <a:rPr lang="uk-UA" dirty="0"/>
+              <a:t>практично не вплинула на затримку, зберігаючи її на рівні «чистих» </a:t>
+            </a:r>
+            <a:r>
+              <a:rPr lang="uk-UA" dirty="0" err="1"/>
+              <a:t>сокетів</a:t>
+            </a:r>
+            <a:endParaRPr lang="en-US" dirty="0"/>
+          </a:p>
+        </p:txBody>
+      </p:sp>
+      <p:sp>
+        <p:nvSpPr>
+          <p:cNvPr id="4" name="Slide Number Placeholder 3">
+            <a:extLst>
+              <a:ext uri="{FF2B5EF4-FFF2-40B4-BE49-F238E27FC236}">
+                <a16:creationId xmlns:a16="http://schemas.microsoft.com/office/drawing/2014/main" id="{587870B7-6ECF-AE59-CACB-515937B0B72B}"/>
+              </a:ext>
+            </a:extLst>
+          </p:cNvPr>
+          <p:cNvSpPr>
+            <a:spLocks noGrp="1"/>
+          </p:cNvSpPr>
+          <p:nvPr>
+            <p:ph type="sldNum" sz="quarter" idx="10"/>
+          </p:nvPr>
+        </p:nvSpPr>
+        <p:spPr/>
+        <p:txBody>
+          <a:bodyPr/>
+          <a:lstStyle/>
+          <a:p>
+            <a:fld id="{F7021451-1387-4CA6-816F-3879F97B5CBC}" type="slidenum">
+              <a:rPr lang="en-US"/>
+              <a:t>10</a:t>
+            </a:fld>
+            <a:endParaRPr lang="en-US"/>
+          </a:p>
+        </p:txBody>
+      </p:sp>
+    </p:spTree>
+    <p:extLst>
+      <p:ext uri="{BB962C8B-B14F-4D97-AF65-F5344CB8AC3E}">
+        <p14:creationId xmlns:p14="http://schemas.microsoft.com/office/powerpoint/2010/main" val="1820892959"/>
+      </p:ext>
+    </p:extLst>
+  </p:cSld>
+  <p:clrMapOvr>
+    <a:masterClrMapping/>
+  </p:clrMapOvr>
+</p:notes>
+</file>
+
+<file path=ppt/notesSlides/notesSlide11.xml><?xml version="1.0" encoding="utf-8"?>
+<p:notes xmlns:a="http://schemas.openxmlformats.org/drawingml/2006/main" xmlns:r="http://schemas.openxmlformats.org/officeDocument/2006/relationships" xmlns:p="http://schemas.openxmlformats.org/presentationml/2006/main">
+  <p:cSld>
+    <p:spTree>
+      <p:nvGrpSpPr>
+        <p:cNvPr id="1" name="">
+          <a:extLst>
+            <a:ext uri="{FF2B5EF4-FFF2-40B4-BE49-F238E27FC236}">
+              <a16:creationId xmlns:a16="http://schemas.microsoft.com/office/drawing/2014/main" id="{FADA48BD-6A37-DAD8-4EB5-D0D5DAD3E200}"/>
+            </a:ext>
+          </a:extLst>
+        </p:cNvPr>
+        <p:cNvGrpSpPr/>
+        <p:nvPr/>
+      </p:nvGrpSpPr>
+      <p:grpSpPr>
+        <a:xfrm>
+          <a:off x="0" y="0"/>
+          <a:ext cx="0" cy="0"/>
+          <a:chOff x="0" y="0"/>
+          <a:chExt cx="0" cy="0"/>
+        </a:xfrm>
+      </p:grpSpPr>
+      <p:sp>
+        <p:nvSpPr>
+          <p:cNvPr id="2" name="Slide Image Placeholder 1">
+            <a:extLst>
+              <a:ext uri="{FF2B5EF4-FFF2-40B4-BE49-F238E27FC236}">
+                <a16:creationId xmlns:a16="http://schemas.microsoft.com/office/drawing/2014/main" id="{51D7EE40-DA39-457F-2E2D-A4DB582CAECC}"/>
+              </a:ext>
+            </a:extLst>
+          </p:cNvPr>
+          <p:cNvSpPr>
+            <a:spLocks noGrp="1" noRot="1" noChangeAspect="1"/>
+          </p:cNvSpPr>
+          <p:nvPr>
+            <p:ph type="sldImg"/>
+          </p:nvPr>
+        </p:nvSpPr>
+        <p:spPr/>
+      </p:sp>
+      <p:sp>
+        <p:nvSpPr>
+          <p:cNvPr id="3" name="Notes Placeholder 2">
+            <a:extLst>
+              <a:ext uri="{FF2B5EF4-FFF2-40B4-BE49-F238E27FC236}">
+                <a16:creationId xmlns:a16="http://schemas.microsoft.com/office/drawing/2014/main" id="{E00B08D1-C22A-C4F6-B6EB-2E3BDED37B00}"/>
+              </a:ext>
+            </a:extLst>
+          </p:cNvPr>
+          <p:cNvSpPr>
+            <a:spLocks noGrp="1"/>
+          </p:cNvSpPr>
+          <p:nvPr>
+            <p:ph type="body" idx="1"/>
+          </p:nvPr>
+        </p:nvSpPr>
+        <p:spPr/>
+        <p:txBody>
+          <a:bodyPr/>
+          <a:lstStyle/>
+          <a:p>
+            <a:r>
+              <a:rPr lang="uk-UA" dirty="0"/>
+              <a:t>Аналіз трафіку виявив цікаві закономірності. </a:t>
+            </a:r>
+            <a:r>
+              <a:rPr lang="en-US" dirty="0"/>
+              <a:t>WebSocket </a:t>
+            </a:r>
+            <a:r>
+              <a:rPr lang="uk-UA" dirty="0"/>
+              <a:t>виявився найбільш економним, особливо у багатокористувацькому режимі. Найбільший </a:t>
+            </a:r>
+            <a:r>
+              <a:rPr lang="uk-UA" dirty="0" err="1"/>
+              <a:t>оверхед</a:t>
+            </a:r>
+            <a:r>
+              <a:rPr lang="uk-UA" dirty="0"/>
+              <a:t> продемонстрували </a:t>
+            </a:r>
+            <a:r>
+              <a:rPr lang="en-US" dirty="0" err="1"/>
+              <a:t>GraphQL</a:t>
+            </a:r>
+            <a:r>
+              <a:rPr lang="en-US" dirty="0"/>
+              <a:t> Subscriptions </a:t>
+            </a:r>
+            <a:r>
+              <a:rPr lang="uk-UA" dirty="0"/>
+              <a:t>через масивну структуру </a:t>
+            </a:r>
+            <a:r>
+              <a:rPr lang="en-US" dirty="0"/>
+              <a:t>JSON-</a:t>
+            </a:r>
+            <a:r>
+              <a:rPr lang="uk-UA" dirty="0"/>
+              <a:t>відповідей, а також </a:t>
+            </a:r>
+            <a:r>
+              <a:rPr lang="en-US" dirty="0"/>
+              <a:t>Server-Sent Events </a:t>
+            </a:r>
+            <a:r>
+              <a:rPr lang="uk-UA" dirty="0"/>
+              <a:t>через текстовий формат передачі. Проте, навіть з урахуванням цього, </a:t>
+            </a:r>
+            <a:r>
+              <a:rPr lang="en-US" dirty="0"/>
+              <a:t>SSE </a:t>
+            </a:r>
+            <a:r>
+              <a:rPr lang="uk-UA" dirty="0"/>
+              <a:t>залишається значно ефективнішим за </a:t>
+            </a:r>
+            <a:r>
+              <a:rPr lang="en-US" dirty="0"/>
+              <a:t>Long Polling, </a:t>
+            </a:r>
+            <a:r>
+              <a:rPr lang="uk-UA" dirty="0"/>
+              <a:t>який на кожну подію змушений ініціювати новий </a:t>
+            </a:r>
+            <a:r>
+              <a:rPr lang="en-US" dirty="0"/>
+              <a:t>HTTP-</a:t>
+            </a:r>
+            <a:r>
+              <a:rPr lang="uk-UA" dirty="0"/>
+              <a:t>цикл з повною передачею заголовків</a:t>
+            </a:r>
+            <a:endParaRPr lang="en-US" dirty="0"/>
+          </a:p>
+        </p:txBody>
+      </p:sp>
+      <p:sp>
+        <p:nvSpPr>
+          <p:cNvPr id="4" name="Slide Number Placeholder 3">
+            <a:extLst>
+              <a:ext uri="{FF2B5EF4-FFF2-40B4-BE49-F238E27FC236}">
+                <a16:creationId xmlns:a16="http://schemas.microsoft.com/office/drawing/2014/main" id="{75285927-805A-6FBB-EEED-C68930EA39B0}"/>
+              </a:ext>
+            </a:extLst>
+          </p:cNvPr>
+          <p:cNvSpPr>
+            <a:spLocks noGrp="1"/>
+          </p:cNvSpPr>
+          <p:nvPr>
+            <p:ph type="sldNum" sz="quarter" idx="10"/>
+          </p:nvPr>
+        </p:nvSpPr>
+        <p:spPr/>
+        <p:txBody>
+          <a:bodyPr/>
+          <a:lstStyle/>
+          <a:p>
+            <a:fld id="{F7021451-1387-4CA6-816F-3879F97B5CBC}" type="slidenum">
+              <a:rPr lang="en-US"/>
+              <a:t>11</a:t>
+            </a:fld>
+            <a:endParaRPr lang="en-US"/>
+          </a:p>
+        </p:txBody>
+      </p:sp>
+    </p:spTree>
+    <p:extLst>
+      <p:ext uri="{BB962C8B-B14F-4D97-AF65-F5344CB8AC3E}">
+        <p14:creationId xmlns:p14="http://schemas.microsoft.com/office/powerpoint/2010/main" val="1124573723"/>
+      </p:ext>
+    </p:extLst>
+  </p:cSld>
+  <p:clrMapOvr>
+    <a:masterClrMapping/>
+  </p:clrMapOvr>
+</p:notes>
+</file>
+
+<file path=ppt/notesSlides/notesSlide12.xml><?xml version="1.0" encoding="utf-8"?>
+<p:notes xmlns:a="http://schemas.openxmlformats.org/drawingml/2006/main" xmlns:r="http://schemas.openxmlformats.org/officeDocument/2006/relationships" xmlns:p="http://schemas.openxmlformats.org/presentationml/2006/main">
+  <p:cSld>
+    <p:spTree>
+      <p:nvGrpSpPr>
         <p:cNvPr id="1" name=""/>
         <p:cNvGrpSpPr/>
         <p:nvPr/>
@@ -610,16 +1990,165 @@
           <a:lstStyle/>
           <a:p>
             <a:r>
+              <a:rPr lang="uk-UA" dirty="0"/>
+              <a:t>Підсумовуючи дослідження, можна сформувати «матрицю вибору» для розробника:</a:t>
+            </a:r>
+          </a:p>
+          <a:p>
+            <a:r>
               <a:rPr lang="en-US" dirty="0"/>
-              <a:t>
-[Sources]
-- https://datatracker.ietf.org/doc/html/rfc6455 (WebSocket)
-- https://html.spec.whatwg.org/multipage/server-sent-events.html (SSE)
-- https://socket.io/docs/v4/ (Socket.IO)
-- https://graphql.org/learn/subscriptions/ (GraphQL Subscriptions)
-[/Sources]
-  </a:t>
-            </a:r>
+              <a:t>WebSocket — </a:t>
+            </a:r>
+            <a:r>
+              <a:rPr lang="uk-UA" dirty="0"/>
+              <a:t>це базовий вибір для </a:t>
+            </a:r>
+            <a:r>
+              <a:rPr lang="uk-UA" dirty="0" err="1"/>
+              <a:t>двонапрямних</a:t>
+            </a:r>
+            <a:r>
+              <a:rPr lang="uk-UA" dirty="0"/>
+              <a:t> систем з високим навантаженням.</a:t>
+            </a:r>
+          </a:p>
+          <a:p>
+            <a:r>
+              <a:rPr lang="en-US" dirty="0"/>
+              <a:t>SSE — </a:t>
+            </a:r>
+            <a:r>
+              <a:rPr lang="uk-UA" dirty="0"/>
+              <a:t>ідеальне рішення для односпрямованих потоків (сповіщень), завдяки простоті та </a:t>
+            </a:r>
+            <a:r>
+              <a:rPr lang="uk-UA" dirty="0" err="1"/>
+              <a:t>нативності</a:t>
+            </a:r>
+            <a:r>
+              <a:rPr lang="uk-UA" dirty="0"/>
+              <a:t>.</a:t>
+            </a:r>
+          </a:p>
+          <a:p>
+            <a:r>
+              <a:rPr lang="en-US" dirty="0"/>
+              <a:t>Socket.IO </a:t>
+            </a:r>
+            <a:r>
+              <a:rPr lang="uk-UA" dirty="0"/>
+              <a:t>варто обирати, коли треба </a:t>
+            </a:r>
+            <a:r>
+              <a:rPr lang="en-US" dirty="0"/>
+              <a:t>WebSocket</a:t>
+            </a:r>
+            <a:r>
+              <a:rPr lang="uk-UA" dirty="0"/>
+              <a:t>, але критично важлива стійкість з’єднання в складних мережах.</a:t>
+            </a:r>
+          </a:p>
+          <a:p>
+            <a:r>
+              <a:rPr lang="en-US" dirty="0" err="1"/>
+              <a:t>GraphQL</a:t>
+            </a:r>
+            <a:r>
+              <a:rPr lang="en-US" dirty="0"/>
+              <a:t> Subscriptions </a:t>
+            </a:r>
+            <a:r>
+              <a:rPr lang="uk-UA" dirty="0"/>
+              <a:t>виправдані лише тоді, коли вся система вже побудована на </a:t>
+            </a:r>
+            <a:r>
+              <a:rPr lang="en-US" dirty="0" err="1"/>
+              <a:t>GraphQL</a:t>
+            </a:r>
+            <a:r>
+              <a:rPr lang="en-US" dirty="0"/>
+              <a:t>. </a:t>
+            </a:r>
+            <a:endParaRPr lang="uk-UA" dirty="0"/>
+          </a:p>
+          <a:p>
+            <a:r>
+              <a:rPr lang="uk-UA" dirty="0"/>
+              <a:t>Експерименти підтвердили неефективність періодичного опитування. Застосування </a:t>
+            </a:r>
+            <a:r>
+              <a:rPr lang="en-US" dirty="0"/>
+              <a:t>Short </a:t>
+            </a:r>
+            <a:r>
+              <a:rPr lang="uk-UA" dirty="0"/>
+              <a:t>та </a:t>
+            </a:r>
+            <a:r>
+              <a:rPr lang="en-US" dirty="0"/>
+              <a:t>Long Polling </a:t>
+            </a:r>
+            <a:r>
+              <a:rPr lang="uk-UA" dirty="0"/>
+              <a:t>сьогодні виправдане лише як </a:t>
+            </a:r>
+            <a:r>
+              <a:rPr lang="en-US" dirty="0"/>
+              <a:t>fallback </a:t>
+            </a:r>
+            <a:r>
+              <a:rPr lang="uk-UA" dirty="0"/>
+              <a:t>для застарілих клієнтів.</a:t>
+            </a:r>
+          </a:p>
+          <a:p>
+            <a:r>
+              <a:rPr lang="uk-UA" dirty="0"/>
+              <a:t>У перспективі дану роботу можна покращити створивши нові, більш складні сценарії для тестування, або додати нові технології до порівняння.</a:t>
+            </a:r>
+          </a:p>
+          <a:p>
+            <a:r>
+              <a:rPr lang="ru-RU" dirty="0" err="1"/>
+              <a:t>Дякую</a:t>
+            </a:r>
+            <a:r>
+              <a:rPr lang="ru-RU" dirty="0"/>
+              <a:t> за </a:t>
+            </a:r>
+            <a:r>
+              <a:rPr lang="ru-RU" dirty="0" err="1"/>
+              <a:t>увагу</a:t>
+            </a:r>
+            <a:r>
+              <a:rPr lang="ru-RU" dirty="0"/>
+              <a:t>, </a:t>
+            </a:r>
+            <a:r>
+              <a:rPr lang="ru-RU" dirty="0" err="1"/>
+              <a:t>готовий</a:t>
+            </a:r>
+            <a:r>
+              <a:rPr lang="ru-RU" dirty="0"/>
+              <a:t> </a:t>
+            </a:r>
+            <a:r>
+              <a:rPr lang="ru-RU" dirty="0" err="1"/>
+              <a:t>продемонструвати</a:t>
+            </a:r>
+            <a:r>
+              <a:rPr lang="ru-RU" dirty="0"/>
+              <a:t> роботу </a:t>
+            </a:r>
+            <a:r>
+              <a:rPr lang="ru-RU" dirty="0" err="1"/>
+              <a:t>програми</a:t>
+            </a:r>
+            <a:r>
+              <a:rPr lang="ru-RU" dirty="0"/>
+              <a:t>!</a:t>
+            </a:r>
+            <a:endParaRPr lang="uk-UA" dirty="0"/>
           </a:p>
         </p:txBody>
       </p:sp>
@@ -640,7 +2169,7 @@
           <a:p>
             <a:fld id="{F7021451-1387-4CA6-816F-3879F97B5CBC}" type="slidenum">
               <a:rPr lang="en-US"/>
-              <a:t>10</a:t>
+              <a:t>12</a:t>
             </a:fld>
             <a:endParaRPr lang="en-US"/>
           </a:p>
@@ -704,15 +2233,16 @@
           <a:lstStyle/>
           <a:p>
             <a:r>
-              <a:rPr lang="en-US" dirty="0"/>
-              <a:t>
-[Sources]
-- https://datatracker.ietf.org/doc/html/rfc6455
-- https://html.spec.whatwg.org/multipage/server-sent-events.html
-- https://socket.io/docs/v4/
-- https://graphql.org/learn/subscriptions/
-[/Sources]
-  </a:t>
+              <a:rPr lang="ru-RU" noProof="1"/>
+              <a:t>Доповідь побудована за логікою проведеного дослідження. Ми пройдемо шлях від  вимог предметної галузі до огляду літератури. Далі розглянемо теоретичний етап — багатокритеріальний вибір за принципом Парето, після чого буде представлений розроблений програмний стенд та результати п</a:t>
+            </a:r>
+            <a:fld id="{C2269592-13D0-46AE-9308-4DF5F5F580DD}" type="slidenum">
+              <a:rPr lang="ru-RU" noProof="1" smtClean="0"/>
+              <a:t>2</a:t>
+            </a:fld>
+            <a:r>
+              <a:rPr lang="ru-RU" noProof="1"/>
+              <a:t>рактичних експериментів щодо затримки та трафіку. Завершимо доповідь сформованими рекомендаціями</a:t>
             </a:r>
           </a:p>
         </p:txBody>
@@ -798,16 +2328,50 @@
           <a:lstStyle/>
           <a:p>
             <a:r>
+              <a:rPr lang="uk-UA" dirty="0"/>
+              <a:t>Сучасний веб вимагає інтерактивності. Такі сценарії, як біржові операції, онлайн-ігри чи системи спільної роботи, неможливі без миттєвого оновлення даних. Ключовими вимогами тут є низька затримка (</a:t>
+            </a:r>
+            <a:r>
               <a:rPr lang="en-US" dirty="0"/>
-              <a:t>
-[Sources]
-- https://datatracker.ietf.org/doc/html/rfc6455 (WebSocket fundamentals)
-- https://html.spec.whatwg.org/multipage/server-sent-events.html (SSE model)
-- https://developer.mozilla.org/en-US/docs/Web/API/WebSockets_API (browser API)
-- https://developer.mozilla.org/en-US/docs/Web/API/EventSource (SSE browser API)
-[/Sources]
-  </a:t>
-            </a:r>
+              <a:t>Latency) </a:t>
+            </a:r>
+            <a:r>
+              <a:rPr lang="uk-UA" dirty="0"/>
+              <a:t>та мінімальний мережевий трафік, тобто </a:t>
+            </a:r>
+            <a:r>
+              <a:rPr lang="uk-UA" dirty="0" err="1"/>
+              <a:t>оверхед</a:t>
+            </a:r>
+            <a:r>
+              <a:rPr lang="uk-UA" dirty="0"/>
+              <a:t>. Проте розробники стикаються з обмеженнями </a:t>
+            </a:r>
+            <a:r>
+              <a:rPr lang="uk-UA" dirty="0" err="1"/>
+              <a:t>вебу</a:t>
+            </a:r>
+            <a:r>
+              <a:rPr lang="uk-UA" dirty="0"/>
+              <a:t>: лімітами браузерних </a:t>
+            </a:r>
+            <a:r>
+              <a:rPr lang="en-US" dirty="0"/>
+              <a:t>API </a:t>
+            </a:r>
+            <a:r>
+              <a:rPr lang="uk-UA" dirty="0"/>
+              <a:t>на кількість одночасних з’єднань, проблемами проксі-серверів та нестабільністю мобільного інтернету. Саме через ці чинники вибір між «чистими» </a:t>
+            </a:r>
+            <a:r>
+              <a:rPr lang="uk-UA" dirty="0" err="1"/>
+              <a:t>сокетами</a:t>
+            </a:r>
+            <a:r>
+              <a:rPr lang="uk-UA" dirty="0"/>
+              <a:t> та бібліотеками стає нетривіальним завданням</a:t>
+            </a:r>
+            <a:endParaRPr lang="en-US" dirty="0"/>
           </a:p>
         </p:txBody>
       </p:sp>
@@ -892,15 +2456,20 @@
           <a:lstStyle/>
           <a:p>
             <a:r>
-              <a:rPr lang="en-US" dirty="0"/>
-              <a:t>
-[Sources]
-- https://html.spec.whatwg.org/multipage/server-sent-events.html (SSE)
-- https://datatracker.ietf.org/doc/html/rfc6455 (WebSocket)
-- https://socket.io/docs/v4/ (Socket.IO overview; fallback described in docs)
-- https://graphql.org/learn/subscriptions/ (GraphQL Subscriptions)
-[/Sources]
-  </a:t>
+              <a:rPr lang="uk-UA" dirty="0"/>
+              <a:t>Переходячи до актуалізації рішень, варто підкреслити ключову відмінність моєї роботи.</a:t>
+            </a:r>
+          </a:p>
+          <a:p>
+            <a:r>
+              <a:rPr lang="uk-UA" dirty="0"/>
+              <a:t>Більшість існуючих досліджень обмежуються аналізом однієї або двох технологій. Через те, що тести проводяться в різних умовах, архітектори не бачать цілісної картини для об'єктивного вибору.</a:t>
+            </a:r>
+          </a:p>
+          <a:p>
+            <a:r>
+              <a:rPr lang="uk-UA" dirty="0"/>
+              <a:t>У цій роботі цю проблему буде вирішено комплексно. Головна новизна полягає у порівнянні одразу шести різнопланових каналів доставки подій у єдиному, повністю ізольованому середовищі. Це дозволило отримати об'єктивні метрики продуктивності та на їх основі сформувати універсальні рекомендації щодо використання технологій</a:t>
             </a:r>
           </a:p>
         </p:txBody>
@@ -986,20 +2555,18 @@
           <a:lstStyle/>
           <a:p>
             <a:r>
+              <a:rPr lang="uk-UA" dirty="0"/>
+              <a:t>У першому розділі було проаналізовано шість обраних технологій, зосередившись на їхніх внутрішніх механізмах. Це допомогло чітко зрозуміти, звідки саме береться затримка та зайвий трафік у традиційному </a:t>
+            </a:r>
+            <a:r>
               <a:rPr lang="en-US" dirty="0"/>
-              <a:t>
-[Sources]
-- https://datatracker.ietf.org/doc/html/rfc6455 (RFC 6455)
-- https://html.spec.whatwg.org/multipage/server-sent-events.html (SSE spec)
-- https://developer.mozilla.org/en-US/docs/Web/API/WebSockets_API (MDN WebSocket API)
-- https://developer.mozilla.org/en-US/docs/Web/API/EventSource (MDN EventSource)
-- https://socket.io/docs/v4/ (Socket.IO docs)
-- https://graphql.org/learn/subscriptions/ (GraphQL Subscriptions)
-- https://www.diva-portal.org/smash/get/diva2:1133465/FULLTEXT01.pdf (performance comparison thesis)
-- https://csitjournal.khmnu.edu.ua/index.php/csit/article/view/214 (supervisor-related publication page)
-[/Sources]
-  </a:t>
-            </a:r>
+              <a:t>HTTP. </a:t>
+            </a:r>
+            <a:r>
+              <a:rPr lang="uk-UA" dirty="0"/>
+              <a:t>Також було формалізовано їхні головні обмеження — від специфіки кодування даних до лімітів браузерних з'єднань. У результаті було виділено п'ять ключових критеріїв оцінки, які стали надійним фундаментом для наступного кроку — побудови математичної моделі вибору.</a:t>
+            </a:r>
+            <a:endParaRPr lang="en-US" dirty="0"/>
           </a:p>
         </p:txBody>
       </p:sp>
@@ -1084,16 +2651,38 @@
           <a:lstStyle/>
           <a:p>
             <a:r>
+              <a:rPr lang="uk-UA" dirty="0"/>
+              <a:t>Метою роботи є порівняльне дослідження шести підходів: від найпростішого </a:t>
+            </a:r>
+            <a:r>
               <a:rPr lang="en-US" dirty="0"/>
-              <a:t>
-[Sources]
-- https://datatracker.ietf.org/doc/html/rfc6455
-- https://html.spec.whatwg.org/multipage/server-sent-events.html
-- https://socket.io/docs/v4/
-- https://graphql.org/learn/subscriptions/
-[/Sources]
-  </a:t>
-            </a:r>
+              <a:t>Short Polling </a:t>
+            </a:r>
+            <a:r>
+              <a:rPr lang="uk-UA" dirty="0"/>
+              <a:t>до складних </a:t>
+            </a:r>
+            <a:r>
+              <a:rPr lang="en-US" dirty="0" err="1"/>
+              <a:t>GraphQL</a:t>
+            </a:r>
+            <a:r>
+              <a:rPr lang="en-US" dirty="0"/>
+              <a:t> Subscriptions. </a:t>
+            </a:r>
+            <a:r>
+              <a:rPr lang="uk-UA" dirty="0"/>
+              <a:t>Оцінка проводилася за п’ятьма критеріями: затримка, мережевий </a:t>
+            </a:r>
+            <a:r>
+              <a:rPr lang="uk-UA" dirty="0" err="1"/>
+              <a:t>оверхед</a:t>
+            </a:r>
+            <a:r>
+              <a:rPr lang="uk-UA" dirty="0"/>
+              <a:t>, масштабованість, складність реалізації та надійність. Для вимірювань було розроблено три сценарії навантаження: швидкі та рідкі події для одного клієнта, а також багатокористувацький режим, що дозволило оцінити поведінку технологій у різних архітектурних умовах</a:t>
+            </a:r>
+            <a:endParaRPr lang="en-US" dirty="0"/>
           </a:p>
         </p:txBody>
       </p:sp>
@@ -1178,14 +2767,50 @@
           <a:lstStyle/>
           <a:p>
             <a:r>
+              <a:rPr lang="uk-UA" dirty="0"/>
+              <a:t>Оскільки жодна технологія не є ідеальною за всіма параметрами, вибір було формалізовано як задачу багатокритеріальної оптимізації. Процес включав: По-перше, нормування шкал (приведення </a:t>
+            </a:r>
+            <a:r>
+              <a:rPr lang="uk-UA" dirty="0" err="1"/>
+              <a:t>мілісекунд</a:t>
+            </a:r>
+            <a:r>
+              <a:rPr lang="uk-UA" dirty="0"/>
+              <a:t>, байтів та експертних оцінок до єдиного діапазону). По-друге, аналіз за принципом Парето, який дозволив відсіяти </a:t>
+            </a:r>
+            <a:r>
+              <a:rPr lang="uk-UA" dirty="0" err="1"/>
+              <a:t>доміновані</a:t>
+            </a:r>
+            <a:r>
+              <a:rPr lang="uk-UA" dirty="0"/>
+              <a:t> варіанти. Зокрема, було виявлено, що </a:t>
+            </a:r>
+            <a:r>
               <a:rPr lang="en-US" dirty="0"/>
-              <a:t>
-[Sources]
-- https://en.wikipedia.org/wiki/Pareto_efficiency (Pareto principle background; optional)
-- https://www.cambridge.org/core/books/decisions-with-multiple-objectives/ (Keeney &amp; Raiffa; multi-criteria utility)
-[/Sources]
-  </a:t>
-            </a:r>
+              <a:t>WebSocket </a:t>
+            </a:r>
+            <a:r>
+              <a:rPr lang="uk-UA" dirty="0"/>
+              <a:t>технічно домінує над </a:t>
+            </a:r>
+            <a:r>
+              <a:rPr lang="en-US" dirty="0"/>
+              <a:t>SSE </a:t>
+            </a:r>
+            <a:r>
+              <a:rPr lang="uk-UA" dirty="0"/>
+              <a:t>за сукупністю параметрів. Нарешті, була застосована адитивна </a:t>
+            </a:r>
+            <a:r>
+              <a:rPr lang="uk-UA" dirty="0" err="1"/>
+              <a:t>згорткова</a:t>
+            </a:r>
+            <a:r>
+              <a:rPr lang="uk-UA" dirty="0"/>
+              <a:t> модель з вагами, де найбільший пріоритет (0.30) отримала затримка доставки</a:t>
+            </a:r>
+            <a:endParaRPr lang="en-US" dirty="0"/>
           </a:p>
         </p:txBody>
       </p:sp>
@@ -1270,14 +2895,42 @@
           <a:lstStyle/>
           <a:p>
             <a:r>
+              <a:rPr lang="uk-UA" dirty="0"/>
+              <a:t>Результати теоретичної моделі представлені на графіку. Абсолютним лідером за корисністю став протокол </a:t>
+            </a:r>
+            <a:r>
               <a:rPr lang="en-US" dirty="0"/>
-              <a:t>
-[Sources]
-- Власні розрахунки в записці (Таблиця «Значення корисності», U(A)).
-- https://www.cambridge.org/core/books/decisions-with-multiple-objectives/ (utility approach background)
-[/Sources]
-  </a:t>
-            </a:r>
+              <a:t>WebSocket </a:t>
+            </a:r>
+            <a:r>
+              <a:rPr lang="uk-UA" dirty="0"/>
+              <a:t>з показником 0.89 завдяки найкращому балансу швидкості та ефективності трафіку. Друге місце посіла бібліотека </a:t>
+            </a:r>
+            <a:r>
+              <a:rPr lang="en-US" dirty="0"/>
+              <a:t>Socket.IO (0.69). </a:t>
+            </a:r>
+            <a:r>
+              <a:rPr lang="uk-UA" dirty="0"/>
+              <a:t>Вона має дещо більший </a:t>
+            </a:r>
+            <a:r>
+              <a:rPr lang="uk-UA" dirty="0" err="1"/>
+              <a:t>оверхед</a:t>
+            </a:r>
+            <a:r>
+              <a:rPr lang="uk-UA" dirty="0"/>
+              <a:t>, але компенсує це високою надійністю та вбудованими механізмами </a:t>
+            </a:r>
+            <a:r>
+              <a:rPr lang="uk-UA" dirty="0" err="1"/>
+              <a:t>перепідключення</a:t>
+            </a:r>
+            <a:r>
+              <a:rPr lang="uk-UA" dirty="0"/>
+              <a:t>. Цей результат став гіпотезою, яку було перевірено на практиці</a:t>
+            </a:r>
+            <a:endParaRPr lang="en-US" dirty="0"/>
           </a:p>
         </p:txBody>
       </p:sp>
@@ -1362,15 +3015,99 @@
           <a:lstStyle/>
           <a:p>
             <a:r>
+              <a:rPr lang="uk-UA" dirty="0"/>
+              <a:t>Для верифікації було розроблено програмний комплекс на базі </a:t>
+            </a:r>
+            <a:r>
               <a:rPr lang="en-US" dirty="0"/>
-              <a:t>
-[Sources]
-- Diagram created for this presentation (no external visual source).
-- https://developer.mozilla.org/en-US/docs/Web/API/WebSockets_API (browser WebSocket)
-- https://developer.mozilla.org/en-US/docs/Web/API/EventSource (browser SSE)
-[/Sources]
-  </a:t>
-            </a:r>
+              <a:t>Next.js </a:t>
+            </a:r>
+            <a:r>
+              <a:rPr lang="uk-UA" dirty="0"/>
+              <a:t>та </a:t>
+            </a:r>
+            <a:r>
+              <a:rPr lang="en-US" dirty="0"/>
+              <a:t>Node.js. </a:t>
+            </a:r>
+            <a:r>
+              <a:rPr lang="uk-UA" dirty="0"/>
+              <a:t>Ключова особливість реалізації — повна уніфікація. Усі шість каналів доставки працюють з єдиним </a:t>
+            </a:r>
+            <a:r>
+              <a:rPr lang="en-US" dirty="0"/>
+              <a:t>JSON-</a:t>
+            </a:r>
+            <a:r>
+              <a:rPr lang="uk-UA" dirty="0"/>
+              <a:t>форматом події, що містить часову мітку </a:t>
+            </a:r>
+            <a:r>
+              <a:rPr lang="en-US" sz="1200" kern="1200" dirty="0" err="1">
+                <a:solidFill>
+                  <a:schemeClr val="tx1"/>
+                </a:solidFill>
+                <a:latin typeface="+mn-lt"/>
+                <a:ea typeface="+mn-ea"/>
+                <a:cs typeface="+mn-cs"/>
+              </a:rPr>
+              <a:t>sentAt</a:t>
+            </a:r>
+            <a:r>
+              <a:rPr lang="en-US" dirty="0"/>
+              <a:t>. </a:t>
+            </a:r>
+            <a:r>
+              <a:rPr lang="uk-UA" dirty="0"/>
+              <a:t>На стороні клієнта використовується універсальний </a:t>
+            </a:r>
+            <a:r>
+              <a:rPr lang="en-US" dirty="0"/>
+              <a:t>React-</a:t>
+            </a:r>
+            <a:r>
+              <a:rPr lang="uk-UA" dirty="0"/>
+              <a:t>хук </a:t>
+            </a:r>
+            <a:r>
+              <a:rPr lang="en-US" sz="1200" kern="1200" dirty="0" err="1">
+                <a:solidFill>
+                  <a:schemeClr val="tx1"/>
+                </a:solidFill>
+                <a:latin typeface="+mn-lt"/>
+                <a:ea typeface="+mn-ea"/>
+                <a:cs typeface="+mn-cs"/>
+              </a:rPr>
+              <a:t>useExperiment</a:t>
+            </a:r>
+            <a:r>
+              <a:rPr lang="en-US" dirty="0"/>
+              <a:t> </a:t>
+            </a:r>
+            <a:r>
+              <a:rPr lang="uk-UA" dirty="0"/>
+              <a:t>з єдиним обробником </a:t>
+            </a:r>
+            <a:r>
+              <a:rPr lang="en-US" sz="1200" kern="1200" dirty="0" err="1">
+                <a:solidFill>
+                  <a:schemeClr val="tx1"/>
+                </a:solidFill>
+                <a:latin typeface="+mn-lt"/>
+                <a:ea typeface="+mn-ea"/>
+                <a:cs typeface="+mn-cs"/>
+              </a:rPr>
+              <a:t>handleIncomingEvent</a:t>
+            </a:r>
+            <a:r>
+              <a:rPr lang="en-US" dirty="0"/>
+              <a:t>. </a:t>
+            </a:r>
+            <a:r>
+              <a:rPr lang="uk-UA" dirty="0"/>
+              <a:t>Це гарантує, що різниця в цифрах зумовлена саме транспортом, а не логікою обробки</a:t>
+            </a:r>
+            <a:endParaRPr lang="en-US" dirty="0"/>
           </a:p>
         </p:txBody>
       </p:sp>
@@ -1462,13 +3199,59 @@
           <a:chExt cx="0" cy="0"/>
         </a:xfrm>
       </p:grpSpPr>
+      <p:sp>
+        <p:nvSpPr>
+          <p:cNvPr id="2" name="Місце для нижнього колонтитула 1">
+            <a:extLst>
+              <a:ext uri="{FF2B5EF4-FFF2-40B4-BE49-F238E27FC236}">
+                <a16:creationId xmlns:a16="http://schemas.microsoft.com/office/drawing/2014/main" id="{37BF09EE-5E26-B261-00D7-917CF661270B}"/>
+              </a:ext>
+            </a:extLst>
+          </p:cNvPr>
+          <p:cNvSpPr>
+            <a:spLocks noGrp="1"/>
+          </p:cNvSpPr>
+          <p:nvPr>
+            <p:ph type="ftr" sz="quarter" idx="3"/>
+          </p:nvPr>
+        </p:nvSpPr>
+        <p:spPr>
+          <a:xfrm>
+            <a:off x="11585275" y="6474304"/>
+            <a:ext cx="606725" cy="365125"/>
+          </a:xfrm>
+          <a:prstGeom prst="rect">
+            <a:avLst/>
+          </a:prstGeom>
+        </p:spPr>
+        <p:txBody>
+          <a:bodyPr vert="horz" lIns="91440" tIns="45720" rIns="91440" bIns="45720" rtlCol="0" anchor="ctr"/>
+          <a:lstStyle>
+            <a:lvl1pPr algn="ctr">
+              <a:defRPr sz="1200">
+                <a:solidFill>
+                  <a:schemeClr val="tx1">
+                    <a:tint val="82000"/>
+                  </a:schemeClr>
+                </a:solidFill>
+              </a:defRPr>
+            </a:lvl1pPr>
+          </a:lstStyle>
+          <a:p>
+            <a:r>
+              <a:rPr lang="uk-UA" dirty="0"/>
+              <a:t>1</a:t>
+            </a:r>
+          </a:p>
+        </p:txBody>
+      </p:sp>
     </p:spTree>
   </p:cSld>
   <p:clrMap bg1="lt1" tx1="dk1" bg2="lt2" tx2="dk2" accent1="accent1" accent2="accent2" accent3="accent3" accent4="accent4" accent5="accent5" accent6="accent6" hlink="hlink" folHlink="folHlink"/>
   <p:sldLayoutIdLst>
     <p:sldLayoutId id="2147483649" r:id="rId1"/>
   </p:sldLayoutIdLst>
-  <p:hf sldNum="0" hdr="0" ftr="0" dt="0"/>
+  <p:hf hdr="0" ftr="0" dt="0"/>
   <p:txStyles>
     <p:titleStyle>
       <a:lvl1pPr algn="ctr" defTabSz="914400" rtl="0" eaLnBrk="1" latinLnBrk="0" hangingPunct="1">
@@ -1749,38 +3532,6 @@
       </p:grpSpPr>
       <p:sp>
         <p:nvSpPr>
-          <p:cNvPr id="2" name="Shape 0"/>
-          <p:cNvSpPr/>
-          <p:nvPr/>
-        </p:nvSpPr>
-        <p:spPr>
-          <a:xfrm>
-            <a:off x="0" y="0"/>
-            <a:ext cx="12188952" cy="6858000"/>
-          </a:xfrm>
-          <a:prstGeom prst="rect">
-            <a:avLst/>
-          </a:prstGeom>
-          <a:solidFill>
-            <a:srgbClr val="F8FAFC"/>
-          </a:solidFill>
-          <a:ln w="12700">
-            <a:solidFill>
-              <a:srgbClr val="F8FAFC"/>
-            </a:solidFill>
-            <a:prstDash val="solid"/>
-          </a:ln>
-        </p:spPr>
-        <p:txBody>
-          <a:bodyPr/>
-          <a:lstStyle/>
-          <a:p>
-            <a:endParaRPr lang="uk-UA" noProof="1"/>
-          </a:p>
-        </p:txBody>
-      </p:sp>
-      <p:sp>
-        <p:nvSpPr>
           <p:cNvPr id="3" name="Text 1"/>
           <p:cNvSpPr/>
           <p:nvPr/>
@@ -2013,7 +3764,7 @@
         </p:nvSpPr>
         <p:spPr>
           <a:xfrm>
-            <a:off x="777240" y="3977640"/>
+            <a:off x="777240" y="4023360"/>
             <a:ext cx="5394960" cy="2148840"/>
           </a:xfrm>
           <a:prstGeom prst="roundRect">
@@ -2213,7 +3964,7 @@
         </p:nvSpPr>
         <p:spPr>
           <a:xfrm>
-            <a:off x="6446520" y="3977640"/>
+            <a:off x="6482342" y="3977640"/>
             <a:ext cx="4965192" cy="2148840"/>
           </a:xfrm>
           <a:prstGeom prst="roundRect">
@@ -2339,6 +4090,48 @@
           </a:p>
         </p:txBody>
       </p:sp>
+      <p:sp>
+        <p:nvSpPr>
+          <p:cNvPr id="14" name="TextBox 13">
+            <a:extLst>
+              <a:ext uri="{FF2B5EF4-FFF2-40B4-BE49-F238E27FC236}">
+                <a16:creationId xmlns:a16="http://schemas.microsoft.com/office/drawing/2014/main" id="{E301A29A-A6A0-E59F-6CC2-71416934A16C}"/>
+              </a:ext>
+            </a:extLst>
+          </p:cNvPr>
+          <p:cNvSpPr txBox="1"/>
+          <p:nvPr/>
+        </p:nvSpPr>
+        <p:spPr>
+          <a:xfrm>
+            <a:off x="11651530" y="6476214"/>
+            <a:ext cx="540470" cy="307777"/>
+          </a:xfrm>
+          <a:prstGeom prst="rect">
+            <a:avLst/>
+          </a:prstGeom>
+          <a:noFill/>
+        </p:spPr>
+        <p:txBody>
+          <a:bodyPr wrap="square" rtlCol="0">
+            <a:spAutoFit/>
+          </a:bodyPr>
+          <a:lstStyle/>
+          <a:p>
+            <a:pPr algn="ctr"/>
+            <a:r>
+              <a:rPr lang="uk-UA" sz="1400" dirty="0">
+                <a:solidFill>
+                  <a:schemeClr val="bg1">
+                    <a:lumMod val="50000"/>
+                  </a:schemeClr>
+                </a:solidFill>
+              </a:rPr>
+              <a:t>1</a:t>
+            </a:r>
+          </a:p>
+        </p:txBody>
+      </p:sp>
     </p:spTree>
   </p:cSld>
   <p:clrMapOvr>
@@ -2348,6 +4141,482 @@
 </file>
 
 <file path=ppt/slides/slide10.xml><?xml version="1.0" encoding="utf-8"?>
+<p:sld xmlns:a="http://schemas.openxmlformats.org/drawingml/2006/main" xmlns:r="http://schemas.openxmlformats.org/officeDocument/2006/relationships" xmlns:p="http://schemas.openxmlformats.org/presentationml/2006/main">
+  <p:cSld>
+    <p:spTree>
+      <p:nvGrpSpPr>
+        <p:cNvPr id="1" name="">
+          <a:extLst>
+            <a:ext uri="{FF2B5EF4-FFF2-40B4-BE49-F238E27FC236}">
+              <a16:creationId xmlns:a16="http://schemas.microsoft.com/office/drawing/2014/main" id="{CDF0BC64-D6A0-C925-DE27-7FBB2321F93D}"/>
+            </a:ext>
+          </a:extLst>
+        </p:cNvPr>
+        <p:cNvGrpSpPr/>
+        <p:nvPr/>
+      </p:nvGrpSpPr>
+      <p:grpSpPr>
+        <a:xfrm>
+          <a:off x="0" y="0"/>
+          <a:ext cx="0" cy="0"/>
+          <a:chOff x="0" y="0"/>
+          <a:chExt cx="0" cy="0"/>
+        </a:xfrm>
+      </p:grpSpPr>
+      <p:sp>
+        <p:nvSpPr>
+          <p:cNvPr id="2" name="Text 0">
+            <a:extLst>
+              <a:ext uri="{FF2B5EF4-FFF2-40B4-BE49-F238E27FC236}">
+                <a16:creationId xmlns:a16="http://schemas.microsoft.com/office/drawing/2014/main" id="{3D93FF86-3F3F-D46F-6C35-3FC0B446EBE3}"/>
+              </a:ext>
+            </a:extLst>
+          </p:cNvPr>
+          <p:cNvSpPr/>
+          <p:nvPr/>
+        </p:nvSpPr>
+        <p:spPr>
+          <a:xfrm>
+            <a:off x="640080" y="320040"/>
+            <a:ext cx="10972800" cy="548640"/>
+          </a:xfrm>
+          <a:prstGeom prst="rect">
+            <a:avLst/>
+          </a:prstGeom>
+          <a:noFill/>
+          <a:ln/>
+        </p:spPr>
+        <p:txBody>
+          <a:bodyPr wrap="square" rtlCol="0" anchor="ctr"/>
+          <a:lstStyle/>
+          <a:p>
+            <a:pPr marL="0" indent="0">
+              <a:buNone/>
+            </a:pPr>
+            <a:r>
+              <a:rPr lang="en-US" sz="3200" b="1" noProof="1">
+                <a:solidFill>
+                  <a:srgbClr val="0F172A"/>
+                </a:solidFill>
+                <a:latin typeface="Calibri" pitchFamily="34" charset="0"/>
+                <a:ea typeface="Calibri" pitchFamily="34" charset="-122"/>
+                <a:cs typeface="Calibri" pitchFamily="34" charset="-120"/>
+              </a:rPr>
+              <a:t>4 </a:t>
+            </a:r>
+            <a:r>
+              <a:rPr lang="uk-UA" sz="3200" b="1" noProof="1">
+                <a:solidFill>
+                  <a:srgbClr val="0F172A"/>
+                </a:solidFill>
+                <a:latin typeface="Calibri" pitchFamily="34" charset="0"/>
+                <a:ea typeface="Calibri" pitchFamily="34" charset="-122"/>
+                <a:cs typeface="Calibri" pitchFamily="34" charset="-120"/>
+              </a:rPr>
+              <a:t>Результати практичного експерименту</a:t>
+            </a:r>
+            <a:endParaRPr lang="uk-UA" sz="3200" noProof="1"/>
+          </a:p>
+        </p:txBody>
+      </p:sp>
+      <p:sp>
+        <p:nvSpPr>
+          <p:cNvPr id="3" name="Shape 1">
+            <a:extLst>
+              <a:ext uri="{FF2B5EF4-FFF2-40B4-BE49-F238E27FC236}">
+                <a16:creationId xmlns:a16="http://schemas.microsoft.com/office/drawing/2014/main" id="{29DAEA93-4333-4E1B-EEA1-FCCDD1F30BD3}"/>
+              </a:ext>
+            </a:extLst>
+          </p:cNvPr>
+          <p:cNvSpPr/>
+          <p:nvPr/>
+        </p:nvSpPr>
+        <p:spPr>
+          <a:xfrm>
+            <a:off x="640080" y="932688"/>
+            <a:ext cx="2011680" cy="73152"/>
+          </a:xfrm>
+          <a:prstGeom prst="rect">
+            <a:avLst/>
+          </a:prstGeom>
+          <a:solidFill>
+            <a:srgbClr val="2563EB"/>
+          </a:solidFill>
+          <a:ln w="12700">
+            <a:solidFill>
+              <a:srgbClr val="2563EB"/>
+            </a:solidFill>
+            <a:prstDash val="solid"/>
+          </a:ln>
+        </p:spPr>
+        <p:txBody>
+          <a:bodyPr/>
+          <a:lstStyle/>
+          <a:p>
+            <a:endParaRPr lang="uk-UA" noProof="1"/>
+          </a:p>
+        </p:txBody>
+      </p:sp>
+      <p:sp>
+        <p:nvSpPr>
+          <p:cNvPr id="9" name="Text 6">
+            <a:extLst>
+              <a:ext uri="{FF2B5EF4-FFF2-40B4-BE49-F238E27FC236}">
+                <a16:creationId xmlns:a16="http://schemas.microsoft.com/office/drawing/2014/main" id="{8EC6F878-837E-33A5-639F-6AAE1C075F19}"/>
+              </a:ext>
+            </a:extLst>
+          </p:cNvPr>
+          <p:cNvSpPr/>
+          <p:nvPr/>
+        </p:nvSpPr>
+        <p:spPr>
+          <a:xfrm>
+            <a:off x="8549640" y="2148840"/>
+            <a:ext cx="2926080" cy="3840480"/>
+          </a:xfrm>
+          <a:prstGeom prst="rect">
+            <a:avLst/>
+          </a:prstGeom>
+          <a:noFill/>
+          <a:ln/>
+        </p:spPr>
+        <p:txBody>
+          <a:bodyPr wrap="square" rtlCol="0" anchor="t"/>
+          <a:lstStyle/>
+          <a:p>
+            <a:pPr marL="228600" indent="-228600">
+              <a:spcAft>
+                <a:spcPts val="600"/>
+              </a:spcAft>
+              <a:buSzPct val="100000"/>
+              <a:buChar char="•"/>
+            </a:pPr>
+            <a:endParaRPr lang="uk-UA" sz="1400" noProof="1"/>
+          </a:p>
+        </p:txBody>
+      </p:sp>
+      <p:graphicFrame>
+        <p:nvGraphicFramePr>
+          <p:cNvPr id="4" name="Діаграма 3">
+            <a:extLst>
+              <a:ext uri="{FF2B5EF4-FFF2-40B4-BE49-F238E27FC236}">
+                <a16:creationId xmlns:a16="http://schemas.microsoft.com/office/drawing/2014/main" id="{85CF2D5C-ACBF-594F-7FF4-91C636ED8961}"/>
+              </a:ext>
+            </a:extLst>
+          </p:cNvPr>
+          <p:cNvGraphicFramePr/>
+          <p:nvPr>
+            <p:extLst>
+              <p:ext uri="{D42A27DB-BD31-4B8C-83A1-F6EECF244321}">
+                <p14:modId xmlns:p14="http://schemas.microsoft.com/office/powerpoint/2010/main" val="2636524737"/>
+              </p:ext>
+            </p:extLst>
+          </p:nvPr>
+        </p:nvGraphicFramePr>
+        <p:xfrm>
+          <a:off x="1502797" y="1281751"/>
+          <a:ext cx="9231464" cy="5062358"/>
+        </p:xfrm>
+        <a:graphic>
+          <a:graphicData uri="http://schemas.openxmlformats.org/drawingml/2006/chart">
+            <c:chart xmlns:c="http://schemas.openxmlformats.org/drawingml/2006/chart" xmlns:r="http://schemas.openxmlformats.org/officeDocument/2006/relationships" r:id="rId3"/>
+          </a:graphicData>
+        </a:graphic>
+      </p:graphicFrame>
+      <p:sp>
+        <p:nvSpPr>
+          <p:cNvPr id="5" name="TextBox 4">
+            <a:extLst>
+              <a:ext uri="{FF2B5EF4-FFF2-40B4-BE49-F238E27FC236}">
+                <a16:creationId xmlns:a16="http://schemas.microsoft.com/office/drawing/2014/main" id="{C9B11725-4291-D748-9D61-A34C905FB1B5}"/>
+              </a:ext>
+            </a:extLst>
+          </p:cNvPr>
+          <p:cNvSpPr txBox="1"/>
+          <p:nvPr/>
+        </p:nvSpPr>
+        <p:spPr>
+          <a:xfrm>
+            <a:off x="11651530" y="6476214"/>
+            <a:ext cx="540470" cy="307777"/>
+          </a:xfrm>
+          <a:prstGeom prst="rect">
+            <a:avLst/>
+          </a:prstGeom>
+          <a:noFill/>
+        </p:spPr>
+        <p:txBody>
+          <a:bodyPr wrap="square" rtlCol="0">
+            <a:spAutoFit/>
+          </a:bodyPr>
+          <a:lstStyle/>
+          <a:p>
+            <a:pPr algn="ctr"/>
+            <a:r>
+              <a:rPr lang="uk-UA" sz="1400" dirty="0">
+                <a:solidFill>
+                  <a:schemeClr val="bg1">
+                    <a:lumMod val="50000"/>
+                  </a:schemeClr>
+                </a:solidFill>
+              </a:rPr>
+              <a:t>10</a:t>
+            </a:r>
+          </a:p>
+        </p:txBody>
+      </p:sp>
+    </p:spTree>
+    <p:extLst>
+      <p:ext uri="{BB962C8B-B14F-4D97-AF65-F5344CB8AC3E}">
+        <p14:creationId xmlns:p14="http://schemas.microsoft.com/office/powerpoint/2010/main" val="1582233836"/>
+      </p:ext>
+    </p:extLst>
+  </p:cSld>
+  <p:clrMapOvr>
+    <a:masterClrMapping/>
+  </p:clrMapOvr>
+</p:sld>
+</file>
+
+<file path=ppt/slides/slide11.xml><?xml version="1.0" encoding="utf-8"?>
+<p:sld xmlns:a="http://schemas.openxmlformats.org/drawingml/2006/main" xmlns:r="http://schemas.openxmlformats.org/officeDocument/2006/relationships" xmlns:p="http://schemas.openxmlformats.org/presentationml/2006/main">
+  <p:cSld>
+    <p:spTree>
+      <p:nvGrpSpPr>
+        <p:cNvPr id="1" name="">
+          <a:extLst>
+            <a:ext uri="{FF2B5EF4-FFF2-40B4-BE49-F238E27FC236}">
+              <a16:creationId xmlns:a16="http://schemas.microsoft.com/office/drawing/2014/main" id="{EC2B5150-AB1C-6D81-8F42-61876BF51A00}"/>
+            </a:ext>
+          </a:extLst>
+        </p:cNvPr>
+        <p:cNvGrpSpPr/>
+        <p:nvPr/>
+      </p:nvGrpSpPr>
+      <p:grpSpPr>
+        <a:xfrm>
+          <a:off x="0" y="0"/>
+          <a:ext cx="0" cy="0"/>
+          <a:chOff x="0" y="0"/>
+          <a:chExt cx="0" cy="0"/>
+        </a:xfrm>
+      </p:grpSpPr>
+      <p:sp>
+        <p:nvSpPr>
+          <p:cNvPr id="2" name="Text 0">
+            <a:extLst>
+              <a:ext uri="{FF2B5EF4-FFF2-40B4-BE49-F238E27FC236}">
+                <a16:creationId xmlns:a16="http://schemas.microsoft.com/office/drawing/2014/main" id="{93F153FA-6854-8656-739A-480E5B99904A}"/>
+              </a:ext>
+            </a:extLst>
+          </p:cNvPr>
+          <p:cNvSpPr/>
+          <p:nvPr/>
+        </p:nvSpPr>
+        <p:spPr>
+          <a:xfrm>
+            <a:off x="640080" y="320040"/>
+            <a:ext cx="10972800" cy="548640"/>
+          </a:xfrm>
+          <a:prstGeom prst="rect">
+            <a:avLst/>
+          </a:prstGeom>
+          <a:noFill/>
+          <a:ln/>
+        </p:spPr>
+        <p:txBody>
+          <a:bodyPr wrap="square" rtlCol="0" anchor="ctr"/>
+          <a:lstStyle/>
+          <a:p>
+            <a:pPr marL="0" indent="0">
+              <a:buNone/>
+            </a:pPr>
+            <a:r>
+              <a:rPr lang="en-US" sz="3200" b="1" noProof="1">
+                <a:solidFill>
+                  <a:srgbClr val="0F172A"/>
+                </a:solidFill>
+                <a:latin typeface="Calibri" pitchFamily="34" charset="0"/>
+                <a:ea typeface="Calibri" pitchFamily="34" charset="-122"/>
+                <a:cs typeface="Calibri" pitchFamily="34" charset="-120"/>
+              </a:rPr>
+              <a:t>4 </a:t>
+            </a:r>
+            <a:r>
+              <a:rPr lang="uk-UA" sz="3200" b="1" noProof="1">
+                <a:solidFill>
+                  <a:srgbClr val="0F172A"/>
+                </a:solidFill>
+                <a:latin typeface="Calibri" pitchFamily="34" charset="0"/>
+                <a:ea typeface="Calibri" pitchFamily="34" charset="-122"/>
+                <a:cs typeface="Calibri" pitchFamily="34" charset="-120"/>
+              </a:rPr>
+              <a:t>Результати практичного експерименту</a:t>
+            </a:r>
+            <a:endParaRPr lang="uk-UA" sz="3200" noProof="1"/>
+          </a:p>
+        </p:txBody>
+      </p:sp>
+      <p:sp>
+        <p:nvSpPr>
+          <p:cNvPr id="3" name="Shape 1">
+            <a:extLst>
+              <a:ext uri="{FF2B5EF4-FFF2-40B4-BE49-F238E27FC236}">
+                <a16:creationId xmlns:a16="http://schemas.microsoft.com/office/drawing/2014/main" id="{C57CF9F6-6142-05FE-B189-55F4A2371FF0}"/>
+              </a:ext>
+            </a:extLst>
+          </p:cNvPr>
+          <p:cNvSpPr/>
+          <p:nvPr/>
+        </p:nvSpPr>
+        <p:spPr>
+          <a:xfrm>
+            <a:off x="640080" y="932688"/>
+            <a:ext cx="2011680" cy="73152"/>
+          </a:xfrm>
+          <a:prstGeom prst="rect">
+            <a:avLst/>
+          </a:prstGeom>
+          <a:solidFill>
+            <a:srgbClr val="2563EB"/>
+          </a:solidFill>
+          <a:ln w="12700">
+            <a:solidFill>
+              <a:srgbClr val="2563EB"/>
+            </a:solidFill>
+            <a:prstDash val="solid"/>
+          </a:ln>
+        </p:spPr>
+        <p:txBody>
+          <a:bodyPr/>
+          <a:lstStyle/>
+          <a:p>
+            <a:endParaRPr lang="uk-UA" noProof="1"/>
+          </a:p>
+        </p:txBody>
+      </p:sp>
+      <p:sp>
+        <p:nvSpPr>
+          <p:cNvPr id="9" name="Text 6">
+            <a:extLst>
+              <a:ext uri="{FF2B5EF4-FFF2-40B4-BE49-F238E27FC236}">
+                <a16:creationId xmlns:a16="http://schemas.microsoft.com/office/drawing/2014/main" id="{FB4AABE1-EA42-CE63-93EA-6A1E707F3ECE}"/>
+              </a:ext>
+            </a:extLst>
+          </p:cNvPr>
+          <p:cNvSpPr/>
+          <p:nvPr/>
+        </p:nvSpPr>
+        <p:spPr>
+          <a:xfrm>
+            <a:off x="8549640" y="2148840"/>
+            <a:ext cx="2926080" cy="3840480"/>
+          </a:xfrm>
+          <a:prstGeom prst="rect">
+            <a:avLst/>
+          </a:prstGeom>
+          <a:noFill/>
+          <a:ln/>
+        </p:spPr>
+        <p:txBody>
+          <a:bodyPr wrap="square" rtlCol="0" anchor="t"/>
+          <a:lstStyle/>
+          <a:p>
+            <a:pPr marL="228600" indent="-228600">
+              <a:spcAft>
+                <a:spcPts val="600"/>
+              </a:spcAft>
+              <a:buSzPct val="100000"/>
+              <a:buChar char="•"/>
+            </a:pPr>
+            <a:endParaRPr lang="uk-UA" sz="1400" noProof="1"/>
+          </a:p>
+        </p:txBody>
+      </p:sp>
+      <p:graphicFrame>
+        <p:nvGraphicFramePr>
+          <p:cNvPr id="5" name="Діаграма 4">
+            <a:extLst>
+              <a:ext uri="{FF2B5EF4-FFF2-40B4-BE49-F238E27FC236}">
+                <a16:creationId xmlns:a16="http://schemas.microsoft.com/office/drawing/2014/main" id="{DB81EE7F-9F74-5499-D51C-6C493FA64A1A}"/>
+              </a:ext>
+            </a:extLst>
+          </p:cNvPr>
+          <p:cNvGraphicFramePr/>
+          <p:nvPr>
+            <p:extLst>
+              <p:ext uri="{D42A27DB-BD31-4B8C-83A1-F6EECF244321}">
+                <p14:modId xmlns:p14="http://schemas.microsoft.com/office/powerpoint/2010/main" val="3069293630"/>
+              </p:ext>
+            </p:extLst>
+          </p:nvPr>
+        </p:nvGraphicFramePr>
+        <p:xfrm>
+          <a:off x="1288112" y="1373984"/>
+          <a:ext cx="9875520" cy="5255813"/>
+        </p:xfrm>
+        <a:graphic>
+          <a:graphicData uri="http://schemas.openxmlformats.org/drawingml/2006/chart">
+            <c:chart xmlns:c="http://schemas.openxmlformats.org/drawingml/2006/chart" xmlns:r="http://schemas.openxmlformats.org/officeDocument/2006/relationships" r:id="rId3"/>
+          </a:graphicData>
+        </a:graphic>
+      </p:graphicFrame>
+      <p:sp>
+        <p:nvSpPr>
+          <p:cNvPr id="4" name="TextBox 3">
+            <a:extLst>
+              <a:ext uri="{FF2B5EF4-FFF2-40B4-BE49-F238E27FC236}">
+                <a16:creationId xmlns:a16="http://schemas.microsoft.com/office/drawing/2014/main" id="{002E3970-B876-AE11-40AD-AE9AB3E0E769}"/>
+              </a:ext>
+            </a:extLst>
+          </p:cNvPr>
+          <p:cNvSpPr txBox="1"/>
+          <p:nvPr/>
+        </p:nvSpPr>
+        <p:spPr>
+          <a:xfrm>
+            <a:off x="11651530" y="6476214"/>
+            <a:ext cx="540470" cy="307777"/>
+          </a:xfrm>
+          <a:prstGeom prst="rect">
+            <a:avLst/>
+          </a:prstGeom>
+          <a:noFill/>
+        </p:spPr>
+        <p:txBody>
+          <a:bodyPr wrap="square" rtlCol="0">
+            <a:spAutoFit/>
+          </a:bodyPr>
+          <a:lstStyle/>
+          <a:p>
+            <a:pPr algn="ctr"/>
+            <a:r>
+              <a:rPr lang="uk-UA" sz="1400" dirty="0">
+                <a:solidFill>
+                  <a:schemeClr val="bg1">
+                    <a:lumMod val="50000"/>
+                  </a:schemeClr>
+                </a:solidFill>
+              </a:rPr>
+              <a:t>11</a:t>
+            </a:r>
+          </a:p>
+        </p:txBody>
+      </p:sp>
+    </p:spTree>
+    <p:extLst>
+      <p:ext uri="{BB962C8B-B14F-4D97-AF65-F5344CB8AC3E}">
+        <p14:creationId xmlns:p14="http://schemas.microsoft.com/office/powerpoint/2010/main" val="2849614477"/>
+      </p:ext>
+    </p:extLst>
+  </p:cSld>
+  <p:clrMapOvr>
+    <a:masterClrMapping/>
+  </p:clrMapOvr>
+</p:sld>
+</file>
+
+<file path=ppt/slides/slide12.xml><?xml version="1.0" encoding="utf-8"?>
 <p:sld xmlns:a="http://schemas.openxmlformats.org/drawingml/2006/main" xmlns:r="http://schemas.openxmlformats.org/officeDocument/2006/relationships" xmlns:p="http://schemas.openxmlformats.org/presentationml/2006/main">
   <p:cSld name="Slide 10">
     <p:bg>
@@ -3701,6 +5970,48 @@
               <a:t>Рекомендації зручно оформити як “матрицю сценаріїв”</a:t>
             </a:r>
             <a:endParaRPr lang="uk-UA" noProof="1"/>
+          </a:p>
+        </p:txBody>
+      </p:sp>
+      <p:sp>
+        <p:nvSpPr>
+          <p:cNvPr id="4" name="TextBox 3">
+            <a:extLst>
+              <a:ext uri="{FF2B5EF4-FFF2-40B4-BE49-F238E27FC236}">
+                <a16:creationId xmlns:a16="http://schemas.microsoft.com/office/drawing/2014/main" id="{1D4BECDF-1484-A6A1-F837-1E47EEDE4861}"/>
+              </a:ext>
+            </a:extLst>
+          </p:cNvPr>
+          <p:cNvSpPr txBox="1"/>
+          <p:nvPr/>
+        </p:nvSpPr>
+        <p:spPr>
+          <a:xfrm>
+            <a:off x="11651530" y="6476214"/>
+            <a:ext cx="540470" cy="307777"/>
+          </a:xfrm>
+          <a:prstGeom prst="rect">
+            <a:avLst/>
+          </a:prstGeom>
+          <a:noFill/>
+        </p:spPr>
+        <p:txBody>
+          <a:bodyPr wrap="square" rtlCol="0">
+            <a:spAutoFit/>
+          </a:bodyPr>
+          <a:lstStyle/>
+          <a:p>
+            <a:pPr algn="ctr"/>
+            <a:r>
+              <a:rPr lang="uk-UA" sz="1400" dirty="0">
+                <a:solidFill>
+                  <a:schemeClr val="bg1">
+                    <a:lumMod val="50000"/>
+                  </a:schemeClr>
+                </a:solidFill>
+              </a:rPr>
+              <a:t>12</a:t>
+            </a:r>
           </a:p>
         </p:txBody>
       </p:sp>
@@ -4938,6 +7249,48 @@
           </a:p>
         </p:txBody>
       </p:sp>
+      <p:sp>
+        <p:nvSpPr>
+          <p:cNvPr id="4" name="TextBox 3">
+            <a:extLst>
+              <a:ext uri="{FF2B5EF4-FFF2-40B4-BE49-F238E27FC236}">
+                <a16:creationId xmlns:a16="http://schemas.microsoft.com/office/drawing/2014/main" id="{1725D575-91E7-56E6-06FB-19D6F20B703F}"/>
+              </a:ext>
+            </a:extLst>
+          </p:cNvPr>
+          <p:cNvSpPr txBox="1"/>
+          <p:nvPr/>
+        </p:nvSpPr>
+        <p:spPr>
+          <a:xfrm>
+            <a:off x="11651530" y="6476214"/>
+            <a:ext cx="540470" cy="307777"/>
+          </a:xfrm>
+          <a:prstGeom prst="rect">
+            <a:avLst/>
+          </a:prstGeom>
+          <a:noFill/>
+        </p:spPr>
+        <p:txBody>
+          <a:bodyPr wrap="square" rtlCol="0">
+            <a:spAutoFit/>
+          </a:bodyPr>
+          <a:lstStyle/>
+          <a:p>
+            <a:pPr algn="ctr"/>
+            <a:r>
+              <a:rPr lang="uk-UA" sz="1400" dirty="0">
+                <a:solidFill>
+                  <a:schemeClr val="bg1">
+                    <a:lumMod val="50000"/>
+                  </a:schemeClr>
+                </a:solidFill>
+              </a:rPr>
+              <a:t>2</a:t>
+            </a:r>
+          </a:p>
+        </p:txBody>
+      </p:sp>
     </p:spTree>
   </p:cSld>
   <p:clrMapOvr>
@@ -5753,6 +8106,48 @@
           </a:p>
         </p:txBody>
       </p:sp>
+      <p:sp>
+        <p:nvSpPr>
+          <p:cNvPr id="4" name="TextBox 3">
+            <a:extLst>
+              <a:ext uri="{FF2B5EF4-FFF2-40B4-BE49-F238E27FC236}">
+                <a16:creationId xmlns:a16="http://schemas.microsoft.com/office/drawing/2014/main" id="{85F12971-76D6-5DC5-00D7-44CE8651FD87}"/>
+              </a:ext>
+            </a:extLst>
+          </p:cNvPr>
+          <p:cNvSpPr txBox="1"/>
+          <p:nvPr/>
+        </p:nvSpPr>
+        <p:spPr>
+          <a:xfrm>
+            <a:off x="11651530" y="6476214"/>
+            <a:ext cx="540470" cy="307777"/>
+          </a:xfrm>
+          <a:prstGeom prst="rect">
+            <a:avLst/>
+          </a:prstGeom>
+          <a:noFill/>
+        </p:spPr>
+        <p:txBody>
+          <a:bodyPr wrap="square" rtlCol="0">
+            <a:spAutoFit/>
+          </a:bodyPr>
+          <a:lstStyle/>
+          <a:p>
+            <a:pPr algn="ctr"/>
+            <a:r>
+              <a:rPr lang="uk-UA" sz="1400" dirty="0">
+                <a:solidFill>
+                  <a:schemeClr val="bg1">
+                    <a:lumMod val="50000"/>
+                  </a:schemeClr>
+                </a:solidFill>
+              </a:rPr>
+              <a:t>3</a:t>
+            </a:r>
+          </a:p>
+        </p:txBody>
+      </p:sp>
     </p:spTree>
   </p:cSld>
   <p:clrMapOvr>
@@ -5955,7 +8350,7 @@
             <a:r>
               <a:rPr lang="uk-UA" sz="1100" b="1" noProof="1">
                 <a:solidFill>
-                  <a:srgbClr val="0F172A"/>
+                  <a:schemeClr val="bg1"/>
                 </a:solidFill>
                 <a:latin typeface="Calibri" pitchFamily="34" charset="0"/>
                 <a:ea typeface="Calibri" pitchFamily="34" charset="-122"/>
@@ -5963,7 +8358,11 @@
               </a:rPr>
               <a:t>Short</a:t>
             </a:r>
-            <a:endParaRPr lang="uk-UA" sz="1100" noProof="1"/>
+            <a:endParaRPr lang="uk-UA" sz="1100" noProof="1">
+              <a:solidFill>
+                <a:schemeClr val="bg1"/>
+              </a:solidFill>
+            </a:endParaRPr>
           </a:p>
           <a:p>
             <a:pPr marL="0" indent="0" algn="ctr">
@@ -5972,7 +8371,7 @@
             <a:r>
               <a:rPr lang="uk-UA" sz="1100" b="1" noProof="1">
                 <a:solidFill>
-                  <a:srgbClr val="0F172A"/>
+                  <a:schemeClr val="bg1"/>
                 </a:solidFill>
                 <a:latin typeface="Calibri" pitchFamily="34" charset="0"/>
                 <a:ea typeface="Calibri" pitchFamily="34" charset="-122"/>
@@ -5980,7 +8379,11 @@
               </a:rPr>
               <a:t>Polling</a:t>
             </a:r>
-            <a:endParaRPr lang="uk-UA" sz="1100" noProof="1"/>
+            <a:endParaRPr lang="uk-UA" sz="1100" noProof="1">
+              <a:solidFill>
+                <a:schemeClr val="bg1"/>
+              </a:solidFill>
+            </a:endParaRPr>
           </a:p>
         </p:txBody>
       </p:sp>
@@ -6075,7 +8478,7 @@
             <a:r>
               <a:rPr lang="uk-UA" sz="1100" b="1" noProof="1">
                 <a:solidFill>
-                  <a:srgbClr val="0F172A"/>
+                  <a:schemeClr val="bg1"/>
                 </a:solidFill>
                 <a:latin typeface="Calibri" pitchFamily="34" charset="0"/>
                 <a:ea typeface="Calibri" pitchFamily="34" charset="-122"/>
@@ -6083,7 +8486,11 @@
               </a:rPr>
               <a:t>Long</a:t>
             </a:r>
-            <a:endParaRPr lang="uk-UA" sz="1100" noProof="1"/>
+            <a:endParaRPr lang="uk-UA" sz="1100" noProof="1">
+              <a:solidFill>
+                <a:schemeClr val="bg1"/>
+              </a:solidFill>
+            </a:endParaRPr>
           </a:p>
           <a:p>
             <a:pPr marL="0" indent="0" algn="ctr">
@@ -6092,7 +8499,7 @@
             <a:r>
               <a:rPr lang="uk-UA" sz="1100" b="1" noProof="1">
                 <a:solidFill>
-                  <a:srgbClr val="0F172A"/>
+                  <a:schemeClr val="bg1"/>
                 </a:solidFill>
                 <a:latin typeface="Calibri" pitchFamily="34" charset="0"/>
                 <a:ea typeface="Calibri" pitchFamily="34" charset="-122"/>
@@ -6100,7 +8507,11 @@
               </a:rPr>
               <a:t>Polling</a:t>
             </a:r>
-            <a:endParaRPr lang="uk-UA" sz="1100" noProof="1"/>
+            <a:endParaRPr lang="uk-UA" sz="1100" noProof="1">
+              <a:solidFill>
+                <a:schemeClr val="bg1"/>
+              </a:solidFill>
+            </a:endParaRPr>
           </a:p>
         </p:txBody>
       </p:sp>
@@ -6164,7 +8575,11 @@
           <a:bodyPr/>
           <a:lstStyle/>
           <a:p>
-            <a:endParaRPr lang="uk-UA" noProof="1"/>
+            <a:endParaRPr lang="uk-UA" noProof="1">
+              <a:solidFill>
+                <a:schemeClr val="bg1"/>
+              </a:solidFill>
+            </a:endParaRPr>
           </a:p>
         </p:txBody>
       </p:sp>
@@ -6195,7 +8610,7 @@
             <a:r>
               <a:rPr lang="uk-UA" sz="1100" b="1" noProof="1">
                 <a:solidFill>
-                  <a:srgbClr val="0F172A"/>
+                  <a:schemeClr val="bg1"/>
                 </a:solidFill>
                 <a:latin typeface="Calibri" pitchFamily="34" charset="0"/>
                 <a:ea typeface="Calibri" pitchFamily="34" charset="-122"/>
@@ -6203,7 +8618,11 @@
               </a:rPr>
               <a:t>SSE</a:t>
             </a:r>
-            <a:endParaRPr lang="uk-UA" sz="1100" noProof="1"/>
+            <a:endParaRPr lang="uk-UA" sz="1100" noProof="1">
+              <a:solidFill>
+                <a:schemeClr val="bg1"/>
+              </a:solidFill>
+            </a:endParaRPr>
           </a:p>
         </p:txBody>
       </p:sp>
@@ -6298,7 +8717,7 @@
             <a:r>
               <a:rPr lang="uk-UA" sz="1100" b="1" noProof="1">
                 <a:solidFill>
-                  <a:srgbClr val="0F172A"/>
+                  <a:schemeClr val="bg1"/>
                 </a:solidFill>
                 <a:latin typeface="Calibri" pitchFamily="34" charset="0"/>
                 <a:ea typeface="Calibri" pitchFamily="34" charset="-122"/>
@@ -6306,7 +8725,11 @@
               </a:rPr>
               <a:t>WebSocket</a:t>
             </a:r>
-            <a:endParaRPr lang="uk-UA" sz="1100" noProof="1"/>
+            <a:endParaRPr lang="uk-UA" sz="1100" noProof="1">
+              <a:solidFill>
+                <a:schemeClr val="bg1"/>
+              </a:solidFill>
+            </a:endParaRPr>
           </a:p>
         </p:txBody>
       </p:sp>
@@ -6401,7 +8824,7 @@
             <a:r>
               <a:rPr lang="uk-UA" sz="1100" b="1" noProof="1">
                 <a:solidFill>
-                  <a:srgbClr val="0F172A"/>
+                  <a:schemeClr val="bg1"/>
                 </a:solidFill>
                 <a:latin typeface="Calibri" pitchFamily="34" charset="0"/>
                 <a:ea typeface="Calibri" pitchFamily="34" charset="-122"/>
@@ -6409,7 +8832,11 @@
               </a:rPr>
               <a:t>Socket.IO</a:t>
             </a:r>
-            <a:endParaRPr lang="uk-UA" sz="1100" noProof="1"/>
+            <a:endParaRPr lang="uk-UA" sz="1100" noProof="1">
+              <a:solidFill>
+                <a:schemeClr val="bg1"/>
+              </a:solidFill>
+            </a:endParaRPr>
           </a:p>
         </p:txBody>
       </p:sp>
@@ -6504,7 +8931,7 @@
             <a:r>
               <a:rPr lang="uk-UA" sz="1100" b="1" noProof="1">
                 <a:solidFill>
-                  <a:srgbClr val="0F172A"/>
+                  <a:schemeClr val="bg1"/>
                 </a:solidFill>
                 <a:latin typeface="Calibri" pitchFamily="34" charset="0"/>
                 <a:ea typeface="Calibri" pitchFamily="34" charset="-122"/>
@@ -6512,7 +8939,11 @@
               </a:rPr>
               <a:t>GraphQL</a:t>
             </a:r>
-            <a:endParaRPr lang="uk-UA" sz="1100" noProof="1"/>
+            <a:endParaRPr lang="uk-UA" sz="1100" noProof="1">
+              <a:solidFill>
+                <a:schemeClr val="bg1"/>
+              </a:solidFill>
+            </a:endParaRPr>
           </a:p>
           <a:p>
             <a:pPr marL="0" indent="0" algn="ctr">
@@ -6521,7 +8952,7 @@
             <a:r>
               <a:rPr lang="uk-UA" sz="1100" b="1" noProof="1">
                 <a:solidFill>
-                  <a:srgbClr val="0F172A"/>
+                  <a:schemeClr val="bg1"/>
                 </a:solidFill>
                 <a:latin typeface="Calibri" pitchFamily="34" charset="0"/>
                 <a:ea typeface="Calibri" pitchFamily="34" charset="-122"/>
@@ -6529,7 +8960,11 @@
               </a:rPr>
               <a:t>Subs</a:t>
             </a:r>
-            <a:endParaRPr lang="uk-UA" sz="1100" noProof="1"/>
+            <a:endParaRPr lang="uk-UA" sz="1100" noProof="1">
+              <a:solidFill>
+                <a:schemeClr val="bg1"/>
+              </a:solidFill>
+            </a:endParaRPr>
           </a:p>
         </p:txBody>
       </p:sp>
@@ -6865,7 +9300,7 @@
         <p:spPr>
           <a:xfrm>
             <a:off x="1577340" y="4270248"/>
-            <a:ext cx="4983480" cy="1691640"/>
+            <a:ext cx="4133088" cy="1691640"/>
           </a:xfrm>
           <a:prstGeom prst="rect">
             <a:avLst/>
@@ -6877,55 +9312,10 @@
           <a:bodyPr wrap="square" rtlCol="0" anchor="t"/>
           <a:lstStyle/>
           <a:p>
-            <a:pPr marL="0" indent="0">
-              <a:buNone/>
-            </a:pPr>
-            <a:r>
-              <a:rPr lang="uk-UA" noProof="1">
-                <a:solidFill>
-                  <a:srgbClr val="334155"/>
-                </a:solidFill>
-                <a:latin typeface="Calibri" pitchFamily="34" charset="0"/>
-                <a:ea typeface="Calibri" pitchFamily="34" charset="-122"/>
-                <a:cs typeface="Calibri" pitchFamily="34" charset="-120"/>
-              </a:rPr>
-              <a:t>Polling створює зайві HTTP-запити</a:t>
-            </a:r>
-            <a:endParaRPr lang="uk-UA" noProof="1"/>
-          </a:p>
-          <a:p>
-            <a:pPr marL="0" indent="0">
-              <a:buNone/>
-            </a:pPr>
-            <a:r>
-              <a:rPr lang="uk-UA" noProof="1">
-                <a:solidFill>
-                  <a:srgbClr val="334155"/>
-                </a:solidFill>
-                <a:latin typeface="Calibri" pitchFamily="34" charset="0"/>
-                <a:ea typeface="Calibri" pitchFamily="34" charset="-122"/>
-                <a:cs typeface="Calibri" pitchFamily="34" charset="-120"/>
-              </a:rPr>
-              <a:t>і додає затримку, залежну</a:t>
-            </a:r>
-            <a:endParaRPr lang="uk-UA" noProof="1"/>
-          </a:p>
-          <a:p>
-            <a:pPr marL="0" indent="0">
-              <a:buNone/>
-            </a:pPr>
-            <a:r>
-              <a:rPr lang="uk-UA" noProof="1">
-                <a:solidFill>
-                  <a:srgbClr val="334155"/>
-                </a:solidFill>
-                <a:latin typeface="Calibri" pitchFamily="34" charset="0"/>
-                <a:ea typeface="Calibri" pitchFamily="34" charset="-122"/>
-                <a:cs typeface="Calibri" pitchFamily="34" charset="-120"/>
-              </a:rPr>
-              <a:t>від інтервалу опитування.</a:t>
-            </a:r>
-            <a:endParaRPr lang="uk-UA" noProof="1"/>
+            <a:r>
+              <a:rPr lang="ru-RU" noProof="1"/>
+              <a:t>Існуючі дослідження переважно обмежуються аналізом 1–2 технологій. Це створює суттєвий брак об'єктивних порівняльних даних для всього спектра протоколів реального часу в однакових умовах.</a:t>
+            </a:r>
           </a:p>
         </p:txBody>
       </p:sp>
@@ -7048,7 +9438,7 @@
         <p:spPr>
           <a:xfrm>
             <a:off x="7063740" y="4270248"/>
-            <a:ext cx="4919472" cy="1691640"/>
+            <a:ext cx="3953807" cy="1691640"/>
           </a:xfrm>
           <a:prstGeom prst="rect">
             <a:avLst/>
@@ -7060,55 +9450,73 @@
           <a:bodyPr wrap="square" rtlCol="0" anchor="t"/>
           <a:lstStyle/>
           <a:p>
-            <a:pPr marL="0" indent="0">
-              <a:buNone/>
-            </a:pPr>
-            <a:r>
-              <a:rPr lang="uk-UA" noProof="1">
-                <a:solidFill>
-                  <a:srgbClr val="334155"/>
-                </a:solidFill>
-                <a:latin typeface="Calibri" pitchFamily="34" charset="0"/>
-                <a:ea typeface="Calibri" pitchFamily="34" charset="-122"/>
-                <a:cs typeface="Calibri" pitchFamily="34" charset="-120"/>
-              </a:rPr>
-              <a:t>Persistent-з’єднання (SSE/WS)</a:t>
-            </a:r>
-            <a:endParaRPr lang="uk-UA" noProof="1"/>
-          </a:p>
-          <a:p>
-            <a:pPr marL="0" indent="0">
-              <a:buNone/>
-            </a:pPr>
-            <a:r>
-              <a:rPr lang="uk-UA" noProof="1">
-                <a:solidFill>
-                  <a:srgbClr val="334155"/>
-                </a:solidFill>
-                <a:latin typeface="Calibri" pitchFamily="34" charset="0"/>
-                <a:ea typeface="Calibri" pitchFamily="34" charset="-122"/>
-                <a:cs typeface="Calibri" pitchFamily="34" charset="-120"/>
-              </a:rPr>
-              <a:t>доставляють події одразу</a:t>
-            </a:r>
-            <a:endParaRPr lang="uk-UA" noProof="1"/>
-          </a:p>
-          <a:p>
-            <a:pPr marL="0" indent="0">
-              <a:buNone/>
-            </a:pPr>
-            <a:r>
-              <a:rPr lang="uk-UA" noProof="1">
-                <a:solidFill>
-                  <a:srgbClr val="334155"/>
-                </a:solidFill>
-                <a:latin typeface="Calibri" pitchFamily="34" charset="0"/>
-                <a:ea typeface="Calibri" pitchFamily="34" charset="-122"/>
-                <a:cs typeface="Calibri" pitchFamily="34" charset="-120"/>
-              </a:rPr>
-              <a:t>та знижують оверхед.</a:t>
-            </a:r>
-            <a:endParaRPr lang="uk-UA" noProof="1"/>
+            <a:r>
+              <a:rPr lang="uk-UA" dirty="0"/>
+              <a:t>Створення єдиного ізольованого стенда для одночасного тестування та порівняння метрик одразу шести технологій (від </a:t>
+            </a:r>
+            <a:r>
+              <a:rPr lang="en-US" dirty="0"/>
+              <a:t>Polling </a:t>
+            </a:r>
+            <a:r>
+              <a:rPr lang="uk-UA" dirty="0"/>
+              <a:t>до </a:t>
+            </a:r>
+            <a:r>
+              <a:rPr lang="en-US" dirty="0" err="1"/>
+              <a:t>GraphQL</a:t>
+            </a:r>
+            <a:r>
+              <a:rPr lang="en-US" dirty="0"/>
+              <a:t> Subscriptions) </a:t>
+            </a:r>
+            <a:r>
+              <a:rPr lang="uk-UA" dirty="0"/>
+              <a:t>із формуванням інженерних рекомендацій.</a:t>
+            </a:r>
+            <a:endParaRPr lang="uk-UA" noProof="1"/>
+          </a:p>
+        </p:txBody>
+      </p:sp>
+      <p:sp>
+        <p:nvSpPr>
+          <p:cNvPr id="4" name="TextBox 3">
+            <a:extLst>
+              <a:ext uri="{FF2B5EF4-FFF2-40B4-BE49-F238E27FC236}">
+                <a16:creationId xmlns:a16="http://schemas.microsoft.com/office/drawing/2014/main" id="{C0329263-FBDB-1576-1F3B-BDA363FF06C3}"/>
+              </a:ext>
+            </a:extLst>
+          </p:cNvPr>
+          <p:cNvSpPr txBox="1"/>
+          <p:nvPr/>
+        </p:nvSpPr>
+        <p:spPr>
+          <a:xfrm>
+            <a:off x="11651530" y="6476214"/>
+            <a:ext cx="540470" cy="307777"/>
+          </a:xfrm>
+          <a:prstGeom prst="rect">
+            <a:avLst/>
+          </a:prstGeom>
+          <a:noFill/>
+        </p:spPr>
+        <p:txBody>
+          <a:bodyPr wrap="square" rtlCol="0">
+            <a:spAutoFit/>
+          </a:bodyPr>
+          <a:lstStyle/>
+          <a:p>
+            <a:pPr algn="ctr"/>
+            <a:r>
+              <a:rPr lang="uk-UA" sz="1400" dirty="0">
+                <a:solidFill>
+                  <a:schemeClr val="bg1">
+                    <a:lumMod val="50000"/>
+                  </a:schemeClr>
+                </a:solidFill>
+              </a:rPr>
+              <a:t>4</a:t>
+            </a:r>
           </a:p>
         </p:txBody>
       </p:sp>
@@ -7224,7 +9632,7 @@
         </p:nvSpPr>
         <p:spPr>
           <a:xfrm>
-            <a:off x="822960" y="1828800"/>
+            <a:off x="1558566" y="1828800"/>
             <a:ext cx="3447288" cy="1097280"/>
           </a:xfrm>
           <a:prstGeom prst="roundRect">
@@ -7263,7 +9671,7 @@
         </p:nvSpPr>
         <p:spPr>
           <a:xfrm>
-            <a:off x="987552" y="1993392"/>
+            <a:off x="1723158" y="1993392"/>
             <a:ext cx="137160" cy="768096"/>
           </a:xfrm>
           <a:prstGeom prst="roundRect">
@@ -7295,8 +9703,8 @@
         </p:nvSpPr>
         <p:spPr>
           <a:xfrm>
-            <a:off x="1252728" y="1961896"/>
-            <a:ext cx="3108960" cy="822960"/>
+            <a:off x="1869462" y="1981264"/>
+            <a:ext cx="3136392" cy="822960"/>
           </a:xfrm>
           <a:prstGeom prst="rect">
             <a:avLst/>
@@ -7308,38 +9716,11 @@
           <a:bodyPr wrap="square" rtlCol="0" anchor="ctr"/>
           <a:lstStyle/>
           <a:p>
-            <a:pPr marL="0" indent="0">
-              <a:buNone/>
-            </a:pPr>
-            <a:r>
-              <a:rPr lang="uk-UA" sz="1800" b="1" noProof="1">
-                <a:solidFill>
-                  <a:srgbClr val="0F172A"/>
-                </a:solidFill>
-                <a:latin typeface="Calibri" pitchFamily="34" charset="0"/>
-                <a:ea typeface="Calibri" pitchFamily="34" charset="-122"/>
-                <a:cs typeface="Calibri" pitchFamily="34" charset="-120"/>
-              </a:rPr>
-              <a:t>Стандарти</a:t>
-            </a:r>
-            <a:endParaRPr lang="uk-UA" sz="1800" noProof="1"/>
-          </a:p>
-          <a:p>
-            <a:pPr marL="0" indent="0">
-              <a:buNone/>
-            </a:pPr>
-            <a:r>
-              <a:rPr lang="uk-UA" sz="1800" b="1" noProof="1">
-                <a:solidFill>
-                  <a:srgbClr val="0F172A"/>
-                </a:solidFill>
-                <a:latin typeface="Calibri" pitchFamily="34" charset="0"/>
-                <a:ea typeface="Calibri" pitchFamily="34" charset="-122"/>
-                <a:cs typeface="Calibri" pitchFamily="34" charset="-120"/>
-              </a:rPr>
-              <a:t>(RFC/WHATWG)</a:t>
-            </a:r>
-            <a:endParaRPr lang="uk-UA" sz="1800" noProof="1"/>
+            <a:r>
+              <a:rPr lang="ru-RU" noProof="1"/>
+              <a:t>Аналіз еволюції та класифікація методів доставки подій у вебсистемах</a:t>
+            </a:r>
+            <a:endParaRPr lang="ru-RU" sz="1800" noProof="1"/>
           </a:p>
         </p:txBody>
       </p:sp>
@@ -7351,7 +9732,7 @@
         </p:nvSpPr>
         <p:spPr>
           <a:xfrm>
-            <a:off x="4434840" y="1828800"/>
+            <a:off x="4389119" y="3328416"/>
             <a:ext cx="3413762" cy="1097280"/>
           </a:xfrm>
           <a:prstGeom prst="roundRect">
@@ -7390,7 +9771,7 @@
         </p:nvSpPr>
         <p:spPr>
           <a:xfrm>
-            <a:off x="4599432" y="1993392"/>
+            <a:off x="4553711" y="3493008"/>
             <a:ext cx="137160" cy="768096"/>
           </a:xfrm>
           <a:prstGeom prst="roundRect">
@@ -7422,8 +9803,8 @@
         </p:nvSpPr>
         <p:spPr>
           <a:xfrm>
-            <a:off x="4855464" y="1970532"/>
-            <a:ext cx="3108960" cy="822960"/>
+            <a:off x="4809743" y="3470148"/>
+            <a:ext cx="2993138" cy="822960"/>
           </a:xfrm>
           <a:prstGeom prst="rect">
             <a:avLst/>
@@ -7435,38 +9816,11 @@
           <a:bodyPr wrap="square" rtlCol="0" anchor="ctr"/>
           <a:lstStyle/>
           <a:p>
-            <a:pPr marL="0" indent="0">
-              <a:buNone/>
-            </a:pPr>
-            <a:r>
-              <a:rPr lang="uk-UA" sz="1800" b="1" noProof="1">
-                <a:solidFill>
-                  <a:srgbClr val="0F172A"/>
-                </a:solidFill>
-                <a:latin typeface="Calibri" pitchFamily="34" charset="0"/>
-                <a:ea typeface="Calibri" pitchFamily="34" charset="-122"/>
-                <a:cs typeface="Calibri" pitchFamily="34" charset="-120"/>
-              </a:rPr>
-              <a:t>Browser APIs</a:t>
-            </a:r>
-            <a:endParaRPr lang="uk-UA" sz="1800" noProof="1"/>
-          </a:p>
-          <a:p>
-            <a:pPr marL="0" indent="0">
-              <a:buNone/>
-            </a:pPr>
-            <a:r>
-              <a:rPr lang="uk-UA" sz="1800" b="1" noProof="1">
-                <a:solidFill>
-                  <a:srgbClr val="0F172A"/>
-                </a:solidFill>
-                <a:latin typeface="Calibri" pitchFamily="34" charset="0"/>
-                <a:ea typeface="Calibri" pitchFamily="34" charset="-122"/>
-                <a:cs typeface="Calibri" pitchFamily="34" charset="-120"/>
-              </a:rPr>
-              <a:t>(MDN)</a:t>
-            </a:r>
-            <a:endParaRPr lang="uk-UA" sz="1800" noProof="1"/>
+            <a:r>
+              <a:rPr lang="ru-RU" noProof="1"/>
+              <a:t>Дослідження внутрішніх механізмів роботи шести обраних технологій</a:t>
+            </a:r>
+            <a:endParaRPr lang="ru-RU" sz="1800" noProof="1"/>
           </a:p>
         </p:txBody>
       </p:sp>
@@ -7478,7 +9832,7 @@
         </p:nvSpPr>
         <p:spPr>
           <a:xfrm>
-            <a:off x="8046720" y="1828800"/>
+            <a:off x="7324344" y="1828800"/>
             <a:ext cx="3520440" cy="1097280"/>
           </a:xfrm>
           <a:prstGeom prst="roundRect">
@@ -7517,7 +9871,7 @@
         </p:nvSpPr>
         <p:spPr>
           <a:xfrm>
-            <a:off x="8211312" y="1993392"/>
+            <a:off x="7488936" y="1993392"/>
             <a:ext cx="137160" cy="768096"/>
           </a:xfrm>
           <a:prstGeom prst="roundRect">
@@ -7549,8 +9903,8 @@
         </p:nvSpPr>
         <p:spPr>
           <a:xfrm>
-            <a:off x="8458200" y="1976628"/>
-            <a:ext cx="3108960" cy="822960"/>
+            <a:off x="7735824" y="1976628"/>
+            <a:ext cx="3307078" cy="822960"/>
           </a:xfrm>
           <a:prstGeom prst="rect">
             <a:avLst/>
@@ -7562,38 +9916,11 @@
           <a:bodyPr wrap="square" rtlCol="0" anchor="ctr"/>
           <a:lstStyle/>
           <a:p>
-            <a:pPr marL="0" indent="0">
-              <a:buNone/>
-            </a:pPr>
-            <a:r>
-              <a:rPr lang="uk-UA" sz="1800" b="1" noProof="1">
-                <a:solidFill>
-                  <a:srgbClr val="0F172A"/>
-                </a:solidFill>
-                <a:latin typeface="Calibri" pitchFamily="34" charset="0"/>
-                <a:ea typeface="Calibri" pitchFamily="34" charset="-122"/>
-                <a:cs typeface="Calibri" pitchFamily="34" charset="-120"/>
-              </a:rPr>
-              <a:t>Бібліотеки</a:t>
-            </a:r>
-            <a:endParaRPr lang="uk-UA" sz="1800" noProof="1"/>
-          </a:p>
-          <a:p>
-            <a:pPr marL="0" indent="0">
-              <a:buNone/>
-            </a:pPr>
-            <a:r>
-              <a:rPr lang="uk-UA" sz="1800" b="1" noProof="1">
-                <a:solidFill>
-                  <a:srgbClr val="0F172A"/>
-                </a:solidFill>
-                <a:latin typeface="Calibri" pitchFamily="34" charset="0"/>
-                <a:ea typeface="Calibri" pitchFamily="34" charset="-122"/>
-                <a:cs typeface="Calibri" pitchFamily="34" charset="-120"/>
-              </a:rPr>
-              <a:t>(Socket.IO)</a:t>
-            </a:r>
-            <a:endParaRPr lang="uk-UA" sz="1800" noProof="1"/>
+            <a:r>
+              <a:rPr lang="ru-RU" noProof="1"/>
+              <a:t>Виявлення причин появи латентності та оверхеду в моделі «запит-відповідь»</a:t>
+            </a:r>
+            <a:endParaRPr lang="ru-RU" sz="1800" noProof="1"/>
           </a:p>
         </p:txBody>
       </p:sp>
@@ -7605,7 +9932,7 @@
         </p:nvSpPr>
         <p:spPr>
           <a:xfrm>
-            <a:off x="2651760" y="3246120"/>
+            <a:off x="1299616" y="4828032"/>
             <a:ext cx="3840480" cy="1097280"/>
           </a:xfrm>
           <a:prstGeom prst="roundRect">
@@ -7644,7 +9971,7 @@
         </p:nvSpPr>
         <p:spPr>
           <a:xfrm>
-            <a:off x="2816352" y="3410712"/>
+            <a:off x="1464208" y="4992624"/>
             <a:ext cx="137160" cy="768096"/>
           </a:xfrm>
           <a:prstGeom prst="roundRect">
@@ -7676,7 +10003,7 @@
         </p:nvSpPr>
         <p:spPr>
           <a:xfrm>
-            <a:off x="3063240" y="3365754"/>
+            <a:off x="1711096" y="4947666"/>
             <a:ext cx="3429000" cy="822960"/>
           </a:xfrm>
           <a:prstGeom prst="rect">
@@ -7689,39 +10016,12 @@
           <a:bodyPr wrap="square" rtlCol="0" anchor="ctr"/>
           <a:lstStyle/>
           <a:p>
-            <a:pPr marL="0" indent="0">
-              <a:buNone/>
-            </a:pPr>
-            <a:r>
-              <a:rPr lang="uk-UA" sz="1800" b="1" noProof="1">
-                <a:solidFill>
-                  <a:srgbClr val="0F172A"/>
-                </a:solidFill>
-                <a:latin typeface="Calibri" pitchFamily="34" charset="0"/>
-                <a:ea typeface="Calibri" pitchFamily="34" charset="-122"/>
-                <a:cs typeface="Calibri" pitchFamily="34" charset="-120"/>
-              </a:rPr>
-              <a:t>GraphQL екосистема</a:t>
+            <a:r>
+              <a:rPr lang="uk-UA" dirty="0"/>
+              <a:t>Визначення обмежень щодо утилізації з'єднань та серіалізації даних</a:t>
             </a:r>
             <a:endParaRPr lang="uk-UA" sz="1800" noProof="1"/>
           </a:p>
-          <a:p>
-            <a:pPr marL="0" indent="0">
-              <a:buNone/>
-            </a:pPr>
-            <a:r>
-              <a:rPr lang="uk-UA" sz="1800" b="1" noProof="1">
-                <a:solidFill>
-                  <a:srgbClr val="0F172A"/>
-                </a:solidFill>
-                <a:latin typeface="Calibri" pitchFamily="34" charset="0"/>
-                <a:ea typeface="Calibri" pitchFamily="34" charset="-122"/>
-                <a:cs typeface="Calibri" pitchFamily="34" charset="-120"/>
-              </a:rPr>
-              <a:t>(Subscriptions)</a:t>
-            </a:r>
-            <a:endParaRPr lang="uk-UA" sz="1800" noProof="1"/>
-          </a:p>
         </p:txBody>
       </p:sp>
       <p:sp>
@@ -7732,7 +10032,7 @@
         </p:nvSpPr>
         <p:spPr>
           <a:xfrm>
-            <a:off x="6720840" y="3246120"/>
+            <a:off x="7022592" y="4828032"/>
             <a:ext cx="4023360" cy="1097280"/>
           </a:xfrm>
           <a:prstGeom prst="roundRect">
@@ -7771,7 +10071,7 @@
         </p:nvSpPr>
         <p:spPr>
           <a:xfrm>
-            <a:off x="6885432" y="3410712"/>
+            <a:off x="7187184" y="4992624"/>
             <a:ext cx="137160" cy="768096"/>
           </a:xfrm>
           <a:prstGeom prst="roundRect">
@@ -7803,7 +10103,7 @@
         </p:nvSpPr>
         <p:spPr>
           <a:xfrm>
-            <a:off x="7123176" y="3383280"/>
+            <a:off x="7424928" y="4965192"/>
             <a:ext cx="3520440" cy="822960"/>
           </a:xfrm>
           <a:prstGeom prst="rect">
@@ -7816,38 +10116,53 @@
           <a:bodyPr wrap="square" rtlCol="0" anchor="ctr"/>
           <a:lstStyle/>
           <a:p>
-            <a:pPr marL="0" indent="0">
-              <a:buNone/>
-            </a:pPr>
-            <a:r>
-              <a:rPr lang="uk-UA" sz="1800" b="1" noProof="1">
-                <a:solidFill>
-                  <a:srgbClr val="0F172A"/>
-                </a:solidFill>
-                <a:latin typeface="Calibri" pitchFamily="34" charset="0"/>
-                <a:ea typeface="Calibri" pitchFamily="34" charset="-122"/>
-                <a:cs typeface="Calibri" pitchFamily="34" charset="-120"/>
-              </a:rPr>
-              <a:t>Порівняльні роботи</a:t>
-            </a:r>
-            <a:endParaRPr lang="uk-UA" sz="1800" noProof="1"/>
-          </a:p>
-          <a:p>
-            <a:pPr marL="0" indent="0">
-              <a:buNone/>
-            </a:pPr>
-            <a:r>
-              <a:rPr lang="uk-UA" sz="1800" b="1" noProof="1">
-                <a:solidFill>
-                  <a:srgbClr val="0F172A"/>
-                </a:solidFill>
-                <a:latin typeface="Calibri" pitchFamily="34" charset="0"/>
-                <a:ea typeface="Calibri" pitchFamily="34" charset="-122"/>
-                <a:cs typeface="Calibri" pitchFamily="34" charset="-120"/>
-              </a:rPr>
-              <a:t>(performance)</a:t>
-            </a:r>
-            <a:endParaRPr lang="uk-UA" sz="1800" noProof="1"/>
+            <a:r>
+              <a:rPr lang="ru-RU" noProof="1"/>
+              <a:t>Формування бази технічних критеріїв для подальшого моделювання.</a:t>
+            </a:r>
+            <a:endParaRPr lang="ru-RU" sz="1800" noProof="1"/>
+          </a:p>
+        </p:txBody>
+      </p:sp>
+      <p:sp>
+        <p:nvSpPr>
+          <p:cNvPr id="21" name="TextBox 20">
+            <a:extLst>
+              <a:ext uri="{FF2B5EF4-FFF2-40B4-BE49-F238E27FC236}">
+                <a16:creationId xmlns:a16="http://schemas.microsoft.com/office/drawing/2014/main" id="{10CB38E1-5EA7-F1C4-BEE6-DE38D263B5F1}"/>
+              </a:ext>
+            </a:extLst>
+          </p:cNvPr>
+          <p:cNvSpPr txBox="1"/>
+          <p:nvPr/>
+        </p:nvSpPr>
+        <p:spPr>
+          <a:xfrm>
+            <a:off x="11651530" y="6476214"/>
+            <a:ext cx="540470" cy="307777"/>
+          </a:xfrm>
+          <a:prstGeom prst="rect">
+            <a:avLst/>
+          </a:prstGeom>
+          <a:noFill/>
+        </p:spPr>
+        <p:txBody>
+          <a:bodyPr wrap="square" rtlCol="0">
+            <a:spAutoFit/>
+          </a:bodyPr>
+          <a:lstStyle/>
+          <a:p>
+            <a:pPr algn="ctr"/>
+            <a:r>
+              <a:rPr lang="uk-UA" sz="1400" dirty="0">
+                <a:solidFill>
+                  <a:schemeClr val="bg1">
+                    <a:lumMod val="50000"/>
+                  </a:schemeClr>
+                </a:solidFill>
+              </a:rPr>
+              <a:t>5</a:t>
+            </a:r>
           </a:p>
         </p:txBody>
       </p:sp>
@@ -8653,6 +10968,48 @@
           </a:p>
         </p:txBody>
       </p:sp>
+      <p:sp>
+        <p:nvSpPr>
+          <p:cNvPr id="4" name="TextBox 3">
+            <a:extLst>
+              <a:ext uri="{FF2B5EF4-FFF2-40B4-BE49-F238E27FC236}">
+                <a16:creationId xmlns:a16="http://schemas.microsoft.com/office/drawing/2014/main" id="{8C35E8D4-6C2D-1F99-A948-1025D34AA45E}"/>
+              </a:ext>
+            </a:extLst>
+          </p:cNvPr>
+          <p:cNvSpPr txBox="1"/>
+          <p:nvPr/>
+        </p:nvSpPr>
+        <p:spPr>
+          <a:xfrm>
+            <a:off x="11651530" y="6476214"/>
+            <a:ext cx="540470" cy="307777"/>
+          </a:xfrm>
+          <a:prstGeom prst="rect">
+            <a:avLst/>
+          </a:prstGeom>
+          <a:noFill/>
+        </p:spPr>
+        <p:txBody>
+          <a:bodyPr wrap="square" rtlCol="0">
+            <a:spAutoFit/>
+          </a:bodyPr>
+          <a:lstStyle/>
+          <a:p>
+            <a:pPr algn="ctr"/>
+            <a:r>
+              <a:rPr lang="uk-UA" sz="1400" dirty="0">
+                <a:solidFill>
+                  <a:schemeClr val="bg1">
+                    <a:lumMod val="50000"/>
+                  </a:schemeClr>
+                </a:solidFill>
+              </a:rPr>
+              <a:t>6</a:t>
+            </a:r>
+          </a:p>
+        </p:txBody>
+      </p:sp>
     </p:spTree>
   </p:cSld>
   <p:clrMapOvr>
@@ -10066,6 +12423,48 @@
           </a:p>
         </p:txBody>
       </p:sp>
+      <p:sp>
+        <p:nvSpPr>
+          <p:cNvPr id="4" name="TextBox 3">
+            <a:extLst>
+              <a:ext uri="{FF2B5EF4-FFF2-40B4-BE49-F238E27FC236}">
+                <a16:creationId xmlns:a16="http://schemas.microsoft.com/office/drawing/2014/main" id="{1E571A4C-E7D5-D3BF-024E-22C592DB9010}"/>
+              </a:ext>
+            </a:extLst>
+          </p:cNvPr>
+          <p:cNvSpPr txBox="1"/>
+          <p:nvPr/>
+        </p:nvSpPr>
+        <p:spPr>
+          <a:xfrm>
+            <a:off x="11651530" y="6476214"/>
+            <a:ext cx="540470" cy="307777"/>
+          </a:xfrm>
+          <a:prstGeom prst="rect">
+            <a:avLst/>
+          </a:prstGeom>
+          <a:noFill/>
+        </p:spPr>
+        <p:txBody>
+          <a:bodyPr wrap="square" rtlCol="0">
+            <a:spAutoFit/>
+          </a:bodyPr>
+          <a:lstStyle/>
+          <a:p>
+            <a:pPr algn="ctr"/>
+            <a:r>
+              <a:rPr lang="uk-UA" sz="1400" dirty="0">
+                <a:solidFill>
+                  <a:schemeClr val="bg1">
+                    <a:lumMod val="50000"/>
+                  </a:schemeClr>
+                </a:solidFill>
+              </a:rPr>
+              <a:t>7</a:t>
+            </a:r>
+          </a:p>
+        </p:txBody>
+      </p:sp>
     </p:spTree>
   </p:cSld>
   <p:clrMapOvr>
@@ -10591,6 +12990,48 @@
           </a:p>
         </p:txBody>
       </p:sp>
+      <p:sp>
+        <p:nvSpPr>
+          <p:cNvPr id="4" name="TextBox 3">
+            <a:extLst>
+              <a:ext uri="{FF2B5EF4-FFF2-40B4-BE49-F238E27FC236}">
+                <a16:creationId xmlns:a16="http://schemas.microsoft.com/office/drawing/2014/main" id="{BE70BDB4-AFED-A505-28A8-8294EB52D320}"/>
+              </a:ext>
+            </a:extLst>
+          </p:cNvPr>
+          <p:cNvSpPr txBox="1"/>
+          <p:nvPr/>
+        </p:nvSpPr>
+        <p:spPr>
+          <a:xfrm>
+            <a:off x="11651530" y="6476214"/>
+            <a:ext cx="540470" cy="307777"/>
+          </a:xfrm>
+          <a:prstGeom prst="rect">
+            <a:avLst/>
+          </a:prstGeom>
+          <a:noFill/>
+        </p:spPr>
+        <p:txBody>
+          <a:bodyPr wrap="square" rtlCol="0">
+            <a:spAutoFit/>
+          </a:bodyPr>
+          <a:lstStyle/>
+          <a:p>
+            <a:pPr algn="ctr"/>
+            <a:r>
+              <a:rPr lang="uk-UA" sz="1400" dirty="0">
+                <a:solidFill>
+                  <a:schemeClr val="bg1">
+                    <a:lumMod val="50000"/>
+                  </a:schemeClr>
+                </a:solidFill>
+              </a:rPr>
+              <a:t>8</a:t>
+            </a:r>
+          </a:p>
+        </p:txBody>
+      </p:sp>
     </p:spTree>
   </p:cSld>
   <p:clrMapOvr>
@@ -10703,8 +13144,8 @@
         </p:nvSpPr>
         <p:spPr>
           <a:xfrm>
-            <a:off x="4896993" y="2532470"/>
-            <a:ext cx="2669284" cy="461665"/>
+            <a:off x="863964" y="1338902"/>
+            <a:ext cx="3125867" cy="461665"/>
           </a:xfrm>
           <a:prstGeom prst="rect">
             <a:avLst/>
@@ -10731,6 +13172,17 @@
                 <a:cs typeface="Calibri" pitchFamily="34" charset="-120"/>
               </a:rPr>
               <a:t>Ключові елементи</a:t>
+            </a:r>
+            <a:r>
+              <a:rPr lang="en-US" sz="2400" b="1" noProof="1">
+                <a:solidFill>
+                  <a:srgbClr val="0F172A"/>
+                </a:solidFill>
+                <a:latin typeface="Calibri" pitchFamily="34" charset="0"/>
+                <a:ea typeface="Calibri" pitchFamily="34" charset="-122"/>
+                <a:cs typeface="Calibri" pitchFamily="34" charset="-120"/>
+              </a:rPr>
+              <a:t>:</a:t>
             </a:r>
             <a:endParaRPr lang="uk-UA" sz="2400" noProof="1"/>
           </a:p>
@@ -10782,7 +13234,7 @@
         </p:nvSpPr>
         <p:spPr>
           <a:xfrm>
-            <a:off x="640080" y="2270791"/>
+            <a:off x="716280" y="1871300"/>
             <a:ext cx="3273552" cy="1077313"/>
           </a:xfrm>
           <a:prstGeom prst="roundRect">
@@ -10834,10 +13286,10 @@
       </p:sp>
       <p:sp>
         <p:nvSpPr>
-          <p:cNvPr id="11" name="Shape 4">
+          <p:cNvPr id="12" name="Shape 4">
             <a:extLst>
               <a:ext uri="{FF2B5EF4-FFF2-40B4-BE49-F238E27FC236}">
-                <a16:creationId xmlns:a16="http://schemas.microsoft.com/office/drawing/2014/main" id="{0D652625-3756-8505-7A54-20035DE34870}"/>
+                <a16:creationId xmlns:a16="http://schemas.microsoft.com/office/drawing/2014/main" id="{D1FBF787-4439-76BA-EA95-C2C3CB01FEFC}"/>
               </a:ext>
             </a:extLst>
           </p:cNvPr>
@@ -10846,7 +13298,7 @@
         </p:nvSpPr>
         <p:spPr>
           <a:xfrm>
-            <a:off x="640078" y="3951234"/>
+            <a:off x="716280" y="5403766"/>
             <a:ext cx="3273552" cy="1077313"/>
           </a:xfrm>
           <a:prstGeom prst="roundRect">
@@ -10870,7 +13322,7 @@
           </a:effectLst>
         </p:spPr>
         <p:txBody>
-          <a:bodyPr/>
+          <a:bodyPr anchor="ctr" anchorCtr="0"/>
           <a:lstStyle/>
           <a:p>
             <a:pPr algn="ctr">
@@ -10882,24 +13334,50 @@
             <a:r>
               <a:rPr lang="uk-UA" noProof="1">
                 <a:solidFill>
-                  <a:srgbClr val="334155"/>
-                </a:solidFill>
-                <a:latin typeface="Calibri" pitchFamily="34" charset="0"/>
-                <a:ea typeface="Calibri" pitchFamily="34" charset="-122"/>
-                <a:cs typeface="Calibri" pitchFamily="34" charset="-120"/>
-              </a:rPr>
-              <a:t>6 каналів доставки (polling…GraphQL)</a:t>
-            </a:r>
-            <a:endParaRPr lang="uk-UA" noProof="1"/>
-          </a:p>
-        </p:txBody>
-      </p:sp>
-      <p:sp>
-        <p:nvSpPr>
-          <p:cNvPr id="12" name="Shape 4">
+                  <a:schemeClr val="tx1">
+                    <a:lumMod val="75000"/>
+                    <a:lumOff val="25000"/>
+                  </a:schemeClr>
+                </a:solidFill>
+              </a:rPr>
+              <a:t>Окремі сервери для </a:t>
+            </a:r>
+          </a:p>
+          <a:p>
+            <a:pPr algn="ctr">
+              <a:spcAft>
+                <a:spcPts val="600"/>
+              </a:spcAft>
+              <a:buSzPct val="100000"/>
+            </a:pPr>
+            <a:r>
+              <a:rPr lang="en-US" noProof="1">
+                <a:solidFill>
+                  <a:schemeClr val="tx1">
+                    <a:lumMod val="75000"/>
+                    <a:lumOff val="25000"/>
+                  </a:schemeClr>
+                </a:solidFill>
+              </a:rPr>
+              <a:t>WS, Socket.IO, SSE</a:t>
+            </a:r>
+            <a:endParaRPr lang="uk-UA" noProof="1">
+              <a:solidFill>
+                <a:schemeClr val="tx1">
+                  <a:lumMod val="75000"/>
+                  <a:lumOff val="25000"/>
+                </a:schemeClr>
+              </a:solidFill>
+            </a:endParaRPr>
+          </a:p>
+        </p:txBody>
+      </p:sp>
+      <p:sp>
+        <p:nvSpPr>
+          <p:cNvPr id="14" name="Shape 4">
             <a:extLst>
               <a:ext uri="{FF2B5EF4-FFF2-40B4-BE49-F238E27FC236}">
-                <a16:creationId xmlns:a16="http://schemas.microsoft.com/office/drawing/2014/main" id="{D1FBF787-4439-76BA-EA95-C2C3CB01FEFC}"/>
+                <a16:creationId xmlns:a16="http://schemas.microsoft.com/office/drawing/2014/main" id="{134800B4-0DEF-275A-C736-2143D532FB7B}"/>
               </a:ext>
             </a:extLst>
           </p:cNvPr>
@@ -10908,7 +13386,7 @@
         </p:nvSpPr>
         <p:spPr>
           <a:xfrm>
-            <a:off x="8278370" y="2270790"/>
+            <a:off x="716280" y="4211556"/>
             <a:ext cx="3273552" cy="1077313"/>
           </a:xfrm>
           <a:prstGeom prst="roundRect">
@@ -10950,18 +13428,65 @@
                 <a:ea typeface="Calibri" pitchFamily="34" charset="-122"/>
                 <a:cs typeface="Calibri" pitchFamily="34" charset="-120"/>
               </a:rPr>
-              <a:t>Метрики: avg, p50, p95, bytes/event</a:t>
-            </a:r>
-            <a:endParaRPr lang="uk-UA" noProof="1"/>
-          </a:p>
-        </p:txBody>
-      </p:sp>
-      <p:sp>
-        <p:nvSpPr>
-          <p:cNvPr id="13" name="Shape 4">
+              <a:t>Єдиний </a:t>
+            </a:r>
+            <a:r>
+              <a:rPr lang="uk-UA" noProof="1">
+                <a:solidFill>
+                  <a:schemeClr val="tx1">
+                    <a:lumMod val="75000"/>
+                    <a:lumOff val="25000"/>
+                  </a:schemeClr>
+                </a:solidFill>
+                <a:latin typeface="Calibri" pitchFamily="34" charset="0"/>
+                <a:ea typeface="Calibri" pitchFamily="34" charset="-122"/>
+                <a:cs typeface="Calibri" pitchFamily="34" charset="-120"/>
+              </a:rPr>
+              <a:t>обробник</a:t>
+            </a:r>
+            <a:r>
+              <a:rPr lang="uk-UA" noProof="1">
+                <a:solidFill>
+                  <a:srgbClr val="334155"/>
+                </a:solidFill>
+                <a:latin typeface="Calibri" pitchFamily="34" charset="0"/>
+                <a:ea typeface="Calibri" pitchFamily="34" charset="-122"/>
+                <a:cs typeface="Calibri" pitchFamily="34" charset="-120"/>
+              </a:rPr>
+              <a:t> </a:t>
+            </a:r>
+            <a:r>
+              <a:rPr lang="en-US" noProof="1">
+                <a:solidFill>
+                  <a:srgbClr val="334155"/>
+                </a:solidFill>
+                <a:latin typeface="Calibri" pitchFamily="34" charset="0"/>
+                <a:ea typeface="Calibri" pitchFamily="34" charset="-122"/>
+                <a:cs typeface="Calibri" pitchFamily="34" charset="-120"/>
+              </a:rPr>
+              <a:t>useExperiment</a:t>
+            </a:r>
+            <a:r>
+              <a:rPr lang="uk-UA" noProof="1">
+                <a:solidFill>
+                  <a:srgbClr val="334155"/>
+                </a:solidFill>
+                <a:latin typeface="Calibri" pitchFamily="34" charset="0"/>
+                <a:ea typeface="Calibri" pitchFamily="34" charset="-122"/>
+                <a:cs typeface="Calibri" pitchFamily="34" charset="-120"/>
+              </a:rPr>
+              <a:t>()</a:t>
+            </a:r>
+            <a:endParaRPr lang="uk-UA" noProof="1"/>
+          </a:p>
+        </p:txBody>
+      </p:sp>
+      <p:sp>
+        <p:nvSpPr>
+          <p:cNvPr id="15" name="Shape 4">
             <a:extLst>
               <a:ext uri="{FF2B5EF4-FFF2-40B4-BE49-F238E27FC236}">
-                <a16:creationId xmlns:a16="http://schemas.microsoft.com/office/drawing/2014/main" id="{E1064289-68A1-4831-7198-4FA30123D845}"/>
+                <a16:creationId xmlns:a16="http://schemas.microsoft.com/office/drawing/2014/main" id="{5F003D25-0010-59C8-30F2-35910E9E4E07}"/>
               </a:ext>
             </a:extLst>
           </p:cNvPr>
@@ -10970,7 +13495,7 @@
         </p:nvSpPr>
         <p:spPr>
           <a:xfrm>
-            <a:off x="8278370" y="3874722"/>
+            <a:off x="716280" y="3019346"/>
             <a:ext cx="3273552" cy="1077313"/>
           </a:xfrm>
           <a:prstGeom prst="roundRect">
@@ -11012,340 +13537,109 @@
                 <a:ea typeface="Calibri" pitchFamily="34" charset="-122"/>
                 <a:cs typeface="Calibri" pitchFamily="34" charset="-120"/>
               </a:rPr>
-              <a:t>Сценарії: часті/рідкі події, 1/N клієнтів</a:t>
-            </a:r>
-            <a:endParaRPr lang="uk-UA" noProof="1"/>
-          </a:p>
-        </p:txBody>
-      </p:sp>
-      <p:sp>
-        <p:nvSpPr>
-          <p:cNvPr id="14" name="Shape 4">
+              <a:t>6 каналів </a:t>
+            </a:r>
+            <a:r>
+              <a:rPr lang="uk-UA" noProof="1">
+                <a:solidFill>
+                  <a:schemeClr val="tx1">
+                    <a:lumMod val="75000"/>
+                    <a:lumOff val="25000"/>
+                  </a:schemeClr>
+                </a:solidFill>
+                <a:latin typeface="Calibri" pitchFamily="34" charset="0"/>
+                <a:ea typeface="Calibri" pitchFamily="34" charset="-122"/>
+                <a:cs typeface="Calibri" pitchFamily="34" charset="-120"/>
+              </a:rPr>
+              <a:t>доставки</a:t>
+            </a:r>
+            <a:r>
+              <a:rPr lang="uk-UA" noProof="1">
+                <a:solidFill>
+                  <a:srgbClr val="334155"/>
+                </a:solidFill>
+                <a:latin typeface="Calibri" pitchFamily="34" charset="0"/>
+                <a:ea typeface="Calibri" pitchFamily="34" charset="-122"/>
+                <a:cs typeface="Calibri" pitchFamily="34" charset="-120"/>
+              </a:rPr>
+              <a:t> (polling…GraphQL)</a:t>
+            </a:r>
+            <a:endParaRPr lang="uk-UA" noProof="1"/>
+          </a:p>
+        </p:txBody>
+      </p:sp>
+      <p:sp>
+        <p:nvSpPr>
+          <p:cNvPr id="4" name="TextBox 3">
             <a:extLst>
               <a:ext uri="{FF2B5EF4-FFF2-40B4-BE49-F238E27FC236}">
-                <a16:creationId xmlns:a16="http://schemas.microsoft.com/office/drawing/2014/main" id="{134800B4-0DEF-275A-C736-2143D532FB7B}"/>
+                <a16:creationId xmlns:a16="http://schemas.microsoft.com/office/drawing/2014/main" id="{CD480642-8055-2501-7157-34F7E23A9903}"/>
               </a:ext>
             </a:extLst>
           </p:cNvPr>
-          <p:cNvSpPr/>
-          <p:nvPr/>
-        </p:nvSpPr>
-        <p:spPr>
-          <a:xfrm>
-            <a:off x="4594859" y="3951233"/>
-            <a:ext cx="3273552" cy="1077313"/>
-          </a:xfrm>
-          <a:prstGeom prst="roundRect">
-            <a:avLst/>
-          </a:prstGeom>
-          <a:solidFill>
-            <a:srgbClr val="FFFFFF"/>
-          </a:solidFill>
-          <a:ln w="12700">
-            <a:solidFill>
-              <a:srgbClr val="E2E8F0"/>
-            </a:solidFill>
-            <a:prstDash val="solid"/>
-          </a:ln>
-          <a:effectLst>
-            <a:outerShdw blurRad="38100" dist="15240" dir="2700000" algn="bl" rotWithShape="0">
-              <a:srgbClr val="000000">
-                <a:alpha val="12000"/>
-              </a:srgbClr>
-            </a:outerShdw>
-          </a:effectLst>
-        </p:spPr>
-        <p:txBody>
-          <a:bodyPr anchor="ctr" anchorCtr="0"/>
-          <a:lstStyle/>
-          <a:p>
-            <a:pPr algn="ctr">
-              <a:spcAft>
-                <a:spcPts val="600"/>
-              </a:spcAft>
-              <a:buSzPct val="100000"/>
-            </a:pPr>
-            <a:r>
-              <a:rPr lang="uk-UA" noProof="1">
-                <a:solidFill>
-                  <a:srgbClr val="334155"/>
-                </a:solidFill>
-                <a:latin typeface="Calibri" pitchFamily="34" charset="0"/>
-                <a:ea typeface="Calibri" pitchFamily="34" charset="-122"/>
-                <a:cs typeface="Calibri" pitchFamily="34" charset="-120"/>
-              </a:rPr>
-              <a:t>Єдиний обробник handleIncomingEvent()</a:t>
-            </a:r>
-            <a:endParaRPr lang="uk-UA" noProof="1"/>
-          </a:p>
-        </p:txBody>
-      </p:sp>
-      <p:sp>
-        <p:nvSpPr>
-          <p:cNvPr id="15" name="Shape 4">
+          <p:cNvSpPr txBox="1"/>
+          <p:nvPr/>
+        </p:nvSpPr>
+        <p:spPr>
+          <a:xfrm>
+            <a:off x="11651530" y="6476214"/>
+            <a:ext cx="540470" cy="307777"/>
+          </a:xfrm>
+          <a:prstGeom prst="rect">
+            <a:avLst/>
+          </a:prstGeom>
+          <a:noFill/>
+        </p:spPr>
+        <p:txBody>
+          <a:bodyPr wrap="square" rtlCol="0">
+            <a:spAutoFit/>
+          </a:bodyPr>
+          <a:lstStyle/>
+          <a:p>
+            <a:pPr algn="ctr"/>
+            <a:r>
+              <a:rPr lang="uk-UA" sz="1400" dirty="0">
+                <a:solidFill>
+                  <a:schemeClr val="bg1">
+                    <a:lumMod val="50000"/>
+                  </a:schemeClr>
+                </a:solidFill>
+              </a:rPr>
+              <a:t>9</a:t>
+            </a:r>
+          </a:p>
+        </p:txBody>
+      </p:sp>
+      <p:pic>
+        <p:nvPicPr>
+          <p:cNvPr id="6" name="Рисунок 5">
             <a:extLst>
               <a:ext uri="{FF2B5EF4-FFF2-40B4-BE49-F238E27FC236}">
-                <a16:creationId xmlns:a16="http://schemas.microsoft.com/office/drawing/2014/main" id="{5F003D25-0010-59C8-30F2-35910E9E4E07}"/>
+                <a16:creationId xmlns:a16="http://schemas.microsoft.com/office/drawing/2014/main" id="{F24DAE6F-B04B-99BB-862B-FF354332D906}"/>
               </a:ext>
             </a:extLst>
           </p:cNvPr>
-          <p:cNvSpPr/>
-          <p:nvPr/>
-        </p:nvSpPr>
-        <p:spPr>
-          <a:xfrm>
-            <a:off x="640080" y="3951234"/>
-            <a:ext cx="3273552" cy="1077313"/>
-          </a:xfrm>
-          <a:prstGeom prst="roundRect">
-            <a:avLst/>
-          </a:prstGeom>
-          <a:solidFill>
-            <a:srgbClr val="FFFFFF"/>
-          </a:solidFill>
-          <a:ln w="12700">
-            <a:solidFill>
-              <a:srgbClr val="E2E8F0"/>
-            </a:solidFill>
-            <a:prstDash val="solid"/>
-          </a:ln>
-          <a:effectLst>
-            <a:outerShdw blurRad="38100" dist="15240" dir="2700000" algn="bl" rotWithShape="0">
-              <a:srgbClr val="000000">
-                <a:alpha val="12000"/>
-              </a:srgbClr>
-            </a:outerShdw>
-          </a:effectLst>
-        </p:spPr>
-        <p:txBody>
-          <a:bodyPr anchor="ctr" anchorCtr="0"/>
-          <a:lstStyle/>
-          <a:p>
-            <a:pPr algn="ctr">
-              <a:spcAft>
-                <a:spcPts val="600"/>
-              </a:spcAft>
-              <a:buSzPct val="100000"/>
-            </a:pPr>
-            <a:r>
-              <a:rPr lang="uk-UA" noProof="1">
-                <a:solidFill>
-                  <a:srgbClr val="334155"/>
-                </a:solidFill>
-                <a:latin typeface="Calibri" pitchFamily="34" charset="0"/>
-                <a:ea typeface="Calibri" pitchFamily="34" charset="-122"/>
-                <a:cs typeface="Calibri" pitchFamily="34" charset="-120"/>
-              </a:rPr>
-              <a:t>6 каналів доставки (polling…GraphQL)</a:t>
-            </a:r>
-            <a:endParaRPr lang="uk-UA" noProof="1"/>
-          </a:p>
-        </p:txBody>
-      </p:sp>
-      <p:cxnSp>
-        <p:nvCxnSpPr>
-          <p:cNvPr id="17" name="Пряма зі стрілкою 16">
-            <a:extLst>
-              <a:ext uri="{FF2B5EF4-FFF2-40B4-BE49-F238E27FC236}">
-                <a16:creationId xmlns:a16="http://schemas.microsoft.com/office/drawing/2014/main" id="{4E49C3CF-36DF-B3BA-5B02-4B4CA9819149}"/>
-              </a:ext>
-            </a:extLst>
-          </p:cNvPr>
-          <p:cNvCxnSpPr>
-            <a:stCxn id="8" idx="1"/>
-            <a:endCxn id="10" idx="3"/>
-          </p:cNvCxnSpPr>
-          <p:nvPr/>
-        </p:nvCxnSpPr>
-        <p:spPr>
-          <a:xfrm flipH="1">
-            <a:off x="3913632" y="2763303"/>
-            <a:ext cx="983361" cy="46145"/>
-          </a:xfrm>
-          <a:prstGeom prst="straightConnector1">
-            <a:avLst/>
-          </a:prstGeom>
-          <a:ln w="25400">
-            <a:tailEnd type="triangle"/>
-          </a:ln>
-        </p:spPr>
-        <p:style>
-          <a:lnRef idx="1">
-            <a:schemeClr val="accent1"/>
-          </a:lnRef>
-          <a:fillRef idx="0">
-            <a:schemeClr val="accent1"/>
-          </a:fillRef>
-          <a:effectRef idx="0">
-            <a:schemeClr val="accent1"/>
-          </a:effectRef>
-          <a:fontRef idx="minor">
-            <a:schemeClr val="tx1"/>
-          </a:fontRef>
-        </p:style>
-      </p:cxnSp>
-      <p:cxnSp>
-        <p:nvCxnSpPr>
-          <p:cNvPr id="19" name="Пряма зі стрілкою 18">
-            <a:extLst>
-              <a:ext uri="{FF2B5EF4-FFF2-40B4-BE49-F238E27FC236}">
-                <a16:creationId xmlns:a16="http://schemas.microsoft.com/office/drawing/2014/main" id="{EE942F71-9CEA-1A77-2005-D4AEEA320474}"/>
-              </a:ext>
-            </a:extLst>
-          </p:cNvPr>
-          <p:cNvCxnSpPr/>
-          <p:nvPr/>
-        </p:nvCxnSpPr>
-        <p:spPr>
-          <a:xfrm flipH="1">
-            <a:off x="3830320" y="2994135"/>
-            <a:ext cx="1066673" cy="957099"/>
-          </a:xfrm>
-          <a:prstGeom prst="straightConnector1">
-            <a:avLst/>
-          </a:prstGeom>
-          <a:ln w="25400">
-            <a:tailEnd type="triangle"/>
-          </a:ln>
-        </p:spPr>
-        <p:style>
-          <a:lnRef idx="1">
-            <a:schemeClr val="accent1"/>
-          </a:lnRef>
-          <a:fillRef idx="0">
-            <a:schemeClr val="accent1"/>
-          </a:fillRef>
-          <a:effectRef idx="0">
-            <a:schemeClr val="accent1"/>
-          </a:effectRef>
-          <a:fontRef idx="minor">
-            <a:schemeClr val="tx1"/>
-          </a:fontRef>
-        </p:style>
-      </p:cxnSp>
-      <p:cxnSp>
-        <p:nvCxnSpPr>
-          <p:cNvPr id="21" name="Пряма зі стрілкою 20">
-            <a:extLst>
-              <a:ext uri="{FF2B5EF4-FFF2-40B4-BE49-F238E27FC236}">
-                <a16:creationId xmlns:a16="http://schemas.microsoft.com/office/drawing/2014/main" id="{C137E2E6-687D-A241-E2FC-FC4600BCF79E}"/>
-              </a:ext>
-            </a:extLst>
-          </p:cNvPr>
-          <p:cNvCxnSpPr/>
-          <p:nvPr/>
-        </p:nvCxnSpPr>
-        <p:spPr>
-          <a:xfrm>
-            <a:off x="7566277" y="2994135"/>
-            <a:ext cx="805563" cy="880587"/>
-          </a:xfrm>
-          <a:prstGeom prst="straightConnector1">
-            <a:avLst/>
-          </a:prstGeom>
-          <a:ln w="25400">
-            <a:tailEnd type="triangle"/>
-          </a:ln>
-        </p:spPr>
-        <p:style>
-          <a:lnRef idx="1">
-            <a:schemeClr val="accent1"/>
-          </a:lnRef>
-          <a:fillRef idx="0">
-            <a:schemeClr val="accent1"/>
-          </a:fillRef>
-          <a:effectRef idx="0">
-            <a:schemeClr val="accent1"/>
-          </a:effectRef>
-          <a:fontRef idx="minor">
-            <a:schemeClr val="tx1"/>
-          </a:fontRef>
-        </p:style>
-      </p:cxnSp>
-      <p:cxnSp>
-        <p:nvCxnSpPr>
-          <p:cNvPr id="23" name="Пряма зі стрілкою 22">
-            <a:extLst>
-              <a:ext uri="{FF2B5EF4-FFF2-40B4-BE49-F238E27FC236}">
-                <a16:creationId xmlns:a16="http://schemas.microsoft.com/office/drawing/2014/main" id="{3EC95235-CF38-DC57-6671-FA452114BD29}"/>
-              </a:ext>
-            </a:extLst>
-          </p:cNvPr>
-          <p:cNvCxnSpPr>
-            <a:stCxn id="8" idx="2"/>
-            <a:endCxn id="14" idx="0"/>
-          </p:cNvCxnSpPr>
-          <p:nvPr/>
-        </p:nvCxnSpPr>
-        <p:spPr>
-          <a:xfrm>
-            <a:off x="6231635" y="2994135"/>
-            <a:ext cx="0" cy="957098"/>
-          </a:xfrm>
-          <a:prstGeom prst="straightConnector1">
-            <a:avLst/>
-          </a:prstGeom>
-          <a:ln w="25400">
-            <a:tailEnd type="triangle"/>
-          </a:ln>
-        </p:spPr>
-        <p:style>
-          <a:lnRef idx="1">
-            <a:schemeClr val="accent1"/>
-          </a:lnRef>
-          <a:fillRef idx="0">
-            <a:schemeClr val="accent1"/>
-          </a:fillRef>
-          <a:effectRef idx="0">
-            <a:schemeClr val="accent1"/>
-          </a:effectRef>
-          <a:fontRef idx="minor">
-            <a:schemeClr val="tx1"/>
-          </a:fontRef>
-        </p:style>
-      </p:cxnSp>
-      <p:cxnSp>
-        <p:nvCxnSpPr>
-          <p:cNvPr id="25" name="Пряма зі стрілкою 24">
-            <a:extLst>
-              <a:ext uri="{FF2B5EF4-FFF2-40B4-BE49-F238E27FC236}">
-                <a16:creationId xmlns:a16="http://schemas.microsoft.com/office/drawing/2014/main" id="{31C11228-B572-B1F4-5015-1D0436261B4C}"/>
-              </a:ext>
-            </a:extLst>
-          </p:cNvPr>
-          <p:cNvCxnSpPr>
-            <a:stCxn id="8" idx="3"/>
-            <a:endCxn id="12" idx="1"/>
-          </p:cNvCxnSpPr>
-          <p:nvPr/>
-        </p:nvCxnSpPr>
-        <p:spPr>
-          <a:xfrm>
-            <a:off x="7566277" y="2763303"/>
-            <a:ext cx="712093" cy="46144"/>
-          </a:xfrm>
-          <a:prstGeom prst="straightConnector1">
-            <a:avLst/>
-          </a:prstGeom>
-          <a:ln w="25400">
-            <a:tailEnd type="triangle"/>
-          </a:ln>
-        </p:spPr>
-        <p:style>
-          <a:lnRef idx="1">
-            <a:schemeClr val="accent1"/>
-          </a:lnRef>
-          <a:fillRef idx="0">
-            <a:schemeClr val="accent1"/>
-          </a:fillRef>
-          <a:effectRef idx="0">
-            <a:schemeClr val="accent1"/>
-          </a:effectRef>
-          <a:fontRef idx="minor">
-            <a:schemeClr val="tx1"/>
-          </a:fontRef>
-        </p:style>
-      </p:cxnSp>
+          <p:cNvPicPr>
+            <a:picLocks noChangeAspect="1"/>
+          </p:cNvPicPr>
+          <p:nvPr/>
+        </p:nvPicPr>
+        <p:blipFill>
+          <a:blip r:embed="rId3"/>
+          <a:stretch>
+            <a:fillRect/>
+          </a:stretch>
+        </p:blipFill>
+        <p:spPr>
+          <a:xfrm>
+            <a:off x="5467546" y="0"/>
+            <a:ext cx="6084374" cy="6875202"/>
+          </a:xfrm>
+          <a:prstGeom prst="rect">
+            <a:avLst/>
+          </a:prstGeom>
+        </p:spPr>
+      </p:pic>
     </p:spTree>
   </p:cSld>
   <p:clrMapOvr>

--- a/2026_М_ПІ_ІПЗм-24-3_Кащенко_Ю_Є.pptx
+++ b/2026_М_ПІ_ІПЗм-24-3_Кащенко_Ю_Є.pptx
@@ -2234,15 +2234,13 @@
           <a:p>
             <a:r>
               <a:rPr lang="ru-RU" noProof="1"/>
-              <a:t>Доповідь побудована за логікою проведеного дослідження. Ми пройдемо шлях від  вимог предметної галузі до огляду літератури. Далі розглянемо теоретичний етап — багатокритеріальний вибір за принципом Парето, після чого буде представлений розроблений програмний стенд та результати п</a:t>
-            </a:r>
-            <a:fld id="{C2269592-13D0-46AE-9308-4DF5F5F580DD}" type="slidenum">
-              <a:rPr lang="ru-RU" noProof="1" smtClean="0"/>
-              <a:t>2</a:t>
-            </a:fld>
+              <a:t>Доповідь побудована за логікою проведеного дослідження. Далі буде оглянуті теоретичні та практичні частини дослідження, а завершено сформованими рекомендаціями щодо кожної з технологій. </a:t>
+            </a:r>
+          </a:p>
+          <a:p>
             <a:r>
               <a:rPr lang="ru-RU" noProof="1"/>
-              <a:t>рактичних експериментів щодо затримки та трафіку. Завершимо доповідь сформованими рекомендаціями</a:t>
+              <a:t>Також варто зазначити, що основні положення та результати проведеного дослідження були успішно апробовані й опубліковані у науковій праці за темою кваліфікаційної роботи.</a:t>
             </a:r>
           </a:p>
         </p:txBody>
